--- a/lectures/PY4E-02-Expressions.pptx
+++ b/lectures/PY4E-02-Expressions.pptx
@@ -15757,7 +15757,7 @@
               <a:buNone/>
             </a:pPr>
             <a:r>
-              <a:rPr lang="en-US" sz="3200" u="none" strike="noStrike" cap="none" dirty="0">
+              <a:rPr lang="en-US" sz="3200" b="1" u="none" strike="noStrike" cap="none" dirty="0">
                 <a:solidFill>
                   <a:schemeClr val="lt1"/>
                 </a:solidFill>
@@ -15769,7 +15769,7 @@
               <a:t>1 + </a:t>
             </a:r>
             <a:r>
-              <a:rPr lang="en-US" sz="3200" u="none" strike="noStrike" cap="none" dirty="0">
+              <a:rPr lang="en-US" sz="3200" b="1" u="none" strike="noStrike" cap="none" dirty="0">
                 <a:solidFill>
                   <a:srgbClr val="00FFFF"/>
                 </a:solidFill>
@@ -15781,7 +15781,7 @@
               <a:t>2 ** 3</a:t>
             </a:r>
             <a:r>
-              <a:rPr lang="en-US" sz="3200" u="none" strike="noStrike" cap="none" dirty="0">
+              <a:rPr lang="en-US" sz="3200" b="1" u="none" strike="noStrike" cap="none" dirty="0">
                 <a:solidFill>
                   <a:schemeClr val="lt1"/>
                 </a:solidFill>
@@ -15838,7 +15838,7 @@
               <a:buNone/>
             </a:pPr>
             <a:r>
-              <a:rPr lang="en-US" sz="3200" u="none" strike="noStrike" cap="none" dirty="0">
+              <a:rPr lang="en-US" sz="3200" b="1" u="none" strike="noStrike" cap="none" dirty="0">
                 <a:solidFill>
                   <a:schemeClr val="lt1"/>
                 </a:solidFill>
@@ -15850,7 +15850,7 @@
               <a:t>1 + </a:t>
             </a:r>
             <a:r>
-              <a:rPr lang="en-US" sz="3200" u="none" strike="noStrike" cap="none" dirty="0">
+              <a:rPr lang="en-US" sz="3200" b="1" u="none" strike="noStrike" cap="none" dirty="0">
                 <a:solidFill>
                   <a:srgbClr val="00FF00"/>
                 </a:solidFill>
@@ -15862,7 +15862,7 @@
               <a:t>8 / 4</a:t>
             </a:r>
             <a:r>
-              <a:rPr lang="en-US" sz="3200" u="none" strike="noStrike" cap="none" dirty="0">
+              <a:rPr lang="en-US" sz="3200" b="1" u="none" strike="noStrike" cap="none" dirty="0">
                 <a:solidFill>
                   <a:schemeClr val="lt1"/>
                 </a:solidFill>
@@ -15945,7 +15945,7 @@
               <a:buNone/>
             </a:pPr>
             <a:r>
-              <a:rPr lang="en-US" sz="3200" u="none" strike="noStrike" cap="none" dirty="0">
+              <a:rPr lang="en-US" sz="3200" b="1" u="none" strike="noStrike" cap="none" dirty="0">
                 <a:solidFill>
                   <a:schemeClr val="lt1"/>
                 </a:solidFill>
@@ -15957,7 +15957,7 @@
               <a:t>1 + </a:t>
             </a:r>
             <a:r>
-              <a:rPr lang="en-US" sz="3200" u="none" strike="noStrike" cap="none" dirty="0">
+              <a:rPr lang="en-US" sz="3200" b="1" u="none" strike="noStrike" cap="none" dirty="0">
                 <a:solidFill>
                   <a:srgbClr val="00FF00"/>
                 </a:solidFill>
@@ -16040,7 +16040,7 @@
               <a:buNone/>
             </a:pPr>
             <a:r>
-              <a:rPr lang="en-US" sz="3200" u="none" strike="noStrike" cap="none" dirty="0">
+              <a:rPr lang="en-US" sz="3200" b="1" u="none" strike="noStrike" cap="none" dirty="0">
                 <a:solidFill>
                   <a:srgbClr val="FF9900"/>
                 </a:solidFill>
@@ -16125,7 +16125,7 @@
               <a:buNone/>
             </a:pPr>
             <a:r>
-              <a:rPr lang="en-US" sz="3200" u="none" strike="noStrike" cap="none" dirty="0">
+              <a:rPr lang="en-US" sz="3200" b="1" u="none" strike="noStrike" cap="none" dirty="0">
                 <a:solidFill>
                   <a:srgbClr val="FF9900"/>
                 </a:solidFill>
@@ -16208,7 +16208,7 @@
               <a:buNone/>
             </a:pPr>
             <a:r>
-              <a:rPr lang="en-US" sz="3600" i="0" u="none" strike="noStrike" cap="none" dirty="0">
+              <a:rPr lang="en-US" sz="3600" b="1" i="0" u="none" strike="noStrike" cap="none" dirty="0">
                 <a:solidFill>
                   <a:schemeClr val="lt1"/>
                 </a:solidFill>
@@ -16220,7 +16220,7 @@
               <a:t>&gt;&gt;&gt; </a:t>
             </a:r>
             <a:r>
-              <a:rPr lang="en-US" sz="3600" i="0" u="none" strike="noStrike" cap="none" dirty="0">
+              <a:rPr lang="en-US" sz="3600" b="1" i="0" u="none" strike="noStrike" cap="none" dirty="0">
                 <a:solidFill>
                   <a:srgbClr val="FFFF00"/>
                 </a:solidFill>
@@ -16251,7 +16251,7 @@
               <a:buNone/>
             </a:pPr>
             <a:r>
-              <a:rPr lang="en-US" sz="3600" i="0" u="none" strike="noStrike" cap="none" dirty="0">
+              <a:rPr lang="en-US" sz="3600" b="1" i="0" u="none" strike="noStrike" cap="none" dirty="0">
                 <a:solidFill>
                   <a:schemeClr val="lt1"/>
                 </a:solidFill>
@@ -16263,7 +16263,7 @@
               <a:t>&gt;&gt;&gt; </a:t>
             </a:r>
             <a:r>
-              <a:rPr lang="en-US" sz="3600" i="0" u="none" strike="noStrike" cap="none" dirty="0">
+              <a:rPr lang="en-US" sz="3600" b="1" i="0" u="none" strike="noStrike" cap="none" dirty="0">
                 <a:solidFill>
                   <a:srgbClr val="FFFF00"/>
                 </a:solidFill>
@@ -16294,7 +16294,7 @@
               <a:buNone/>
             </a:pPr>
             <a:r>
-              <a:rPr lang="en-US" sz="3600" i="0" u="none" strike="noStrike" cap="none" dirty="0">
+              <a:rPr lang="en-US" sz="3600" b="1" i="0" u="none" strike="noStrike" cap="none" dirty="0">
                 <a:solidFill>
                   <a:schemeClr val="lt1"/>
                 </a:solidFill>
@@ -16325,18 +16325,6 @@
               <a:buNone/>
             </a:pPr>
             <a:r>
-              <a:rPr lang="en-US" sz="3600" i="0" u="none" strike="noStrike" cap="none" dirty="0">
-                <a:solidFill>
-                  <a:schemeClr val="lt1"/>
-                </a:solidFill>
-                <a:latin typeface="Courier"/>
-                <a:ea typeface="Courier"/>
-                <a:cs typeface="Courier"/>
-                <a:sym typeface="Courier New"/>
-              </a:rPr>
-              <a:t>&gt;&gt;&gt;</a:t>
-            </a:r>
-            <a:r>
               <a:rPr lang="en-US" sz="3600" b="1" i="0" u="none" strike="noStrike" cap="none" dirty="0">
                 <a:solidFill>
                   <a:schemeClr val="lt1"/>
@@ -16346,7 +16334,7 @@
                 <a:cs typeface="Courier"/>
                 <a:sym typeface="Courier New"/>
               </a:rPr>
-              <a:t> </a:t>
+              <a:t>&gt;&gt;&gt; </a:t>
             </a:r>
           </a:p>
         </p:txBody>
@@ -17535,7 +17523,7 @@
               <a:buNone/>
             </a:pPr>
             <a:r>
-              <a:rPr lang="en-US" sz="2800" i="0" u="none" strike="noStrike" cap="none" dirty="0">
+              <a:rPr lang="en-US" sz="2800" b="1" i="0" u="none" strike="noStrike" cap="none" dirty="0">
                 <a:solidFill>
                   <a:srgbClr val="FFFF00"/>
                 </a:solidFill>
@@ -17547,7 +17535,7 @@
               <a:t>&gt;&gt;&gt; </a:t>
             </a:r>
             <a:r>
-              <a:rPr lang="en-US" sz="2800" i="0" u="none" strike="noStrike" cap="none" dirty="0" err="1">
+              <a:rPr lang="en-US" sz="2800" b="1" i="0" u="none" strike="noStrike" cap="none" dirty="0" err="1">
                 <a:solidFill>
                   <a:srgbClr val="FFFF00"/>
                 </a:solidFill>
@@ -17559,7 +17547,7 @@
               <a:t>ddd</a:t>
             </a:r>
             <a:r>
-              <a:rPr lang="en-US" sz="2800" i="0" u="none" strike="noStrike" cap="none" dirty="0">
+              <a:rPr lang="en-US" sz="2800" b="1" i="0" u="none" strike="noStrike" cap="none" dirty="0">
                 <a:solidFill>
                   <a:srgbClr val="FFFF00"/>
                 </a:solidFill>
@@ -17590,7 +17578,7 @@
               <a:buNone/>
             </a:pPr>
             <a:r>
-              <a:rPr lang="en-US" sz="2800" i="0" u="none" strike="noStrike" cap="none" dirty="0">
+              <a:rPr lang="en-US" sz="2800" b="1" i="0" u="none" strike="noStrike" cap="none" dirty="0">
                 <a:solidFill>
                   <a:srgbClr val="FFFF00"/>
                 </a:solidFill>
@@ -17602,7 +17590,7 @@
               <a:t>&gt;&gt;&gt; print(</a:t>
             </a:r>
             <a:r>
-              <a:rPr lang="en-US" sz="2800" i="0" u="none" strike="noStrike" cap="none" dirty="0" err="1">
+              <a:rPr lang="en-US" sz="2800" b="1" i="0" u="none" strike="noStrike" cap="none" dirty="0" err="1">
                 <a:solidFill>
                   <a:srgbClr val="FFFF00"/>
                 </a:solidFill>
@@ -17614,7 +17602,7 @@
               <a:t>ddd</a:t>
             </a:r>
             <a:r>
-              <a:rPr lang="en-US" sz="2800" i="0" u="none" strike="noStrike" cap="none" dirty="0">
+              <a:rPr lang="en-US" sz="2800" b="1" i="0" u="none" strike="noStrike" cap="none" dirty="0">
                 <a:solidFill>
                   <a:srgbClr val="FFFF00"/>
                 </a:solidFill>
@@ -17645,7 +17633,7 @@
               <a:buNone/>
             </a:pPr>
             <a:r>
-              <a:rPr lang="en-US" sz="2800" i="0" u="none" strike="noStrike" cap="none" dirty="0">
+              <a:rPr lang="en-US" sz="2800" b="1" i="0" u="none" strike="noStrike" cap="none" dirty="0">
                 <a:solidFill>
                   <a:srgbClr val="FFFF00"/>
                 </a:solidFill>
@@ -17676,7 +17664,7 @@
               <a:buNone/>
             </a:pPr>
             <a:r>
-              <a:rPr lang="en-US" sz="2800" i="0" u="none" strike="noStrike" cap="none" dirty="0">
+              <a:rPr lang="en-US" sz="2800" b="1" i="0" u="none" strike="noStrike" cap="none" dirty="0">
                 <a:solidFill>
                   <a:srgbClr val="FFFF00"/>
                 </a:solidFill>
@@ -17688,7 +17676,7 @@
               <a:t>&gt;&gt;&gt; </a:t>
             </a:r>
             <a:r>
-              <a:rPr lang="en-US" sz="2800" i="0" u="none" strike="noStrike" cap="none" dirty="0" err="1">
+              <a:rPr lang="en-US" sz="2800" b="1" i="0" u="none" strike="noStrike" cap="none" dirty="0" err="1">
                 <a:solidFill>
                   <a:srgbClr val="FFFF00"/>
                 </a:solidFill>
@@ -17700,7 +17688,7 @@
               <a:t>eee</a:t>
             </a:r>
             <a:r>
-              <a:rPr lang="en-US" sz="2800" i="0" u="none" strike="noStrike" cap="none" dirty="0">
+              <a:rPr lang="en-US" sz="2800" b="1" i="0" u="none" strike="noStrike" cap="none" dirty="0">
                 <a:solidFill>
                   <a:srgbClr val="FFFF00"/>
                 </a:solidFill>
@@ -17731,7 +17719,7 @@
               <a:buNone/>
             </a:pPr>
             <a:r>
-              <a:rPr lang="en-US" sz="2800" i="0" u="none" strike="noStrike" cap="none" dirty="0">
+              <a:rPr lang="en-US" sz="2800" b="1" i="0" u="none" strike="noStrike" cap="none" dirty="0">
                 <a:solidFill>
                   <a:srgbClr val="FFFF00"/>
                 </a:solidFill>
@@ -17743,7 +17731,7 @@
               <a:t>&gt;&gt;&gt; print(</a:t>
             </a:r>
             <a:r>
-              <a:rPr lang="en-US" sz="2800" i="0" u="none" strike="noStrike" cap="none" dirty="0" err="1">
+              <a:rPr lang="en-US" sz="2800" b="1" i="0" u="none" strike="noStrike" cap="none" dirty="0" err="1">
                 <a:solidFill>
                   <a:srgbClr val="FFFF00"/>
                 </a:solidFill>
@@ -17755,7 +17743,7 @@
               <a:t>eee</a:t>
             </a:r>
             <a:r>
-              <a:rPr lang="en-US" sz="2800" i="0" u="none" strike="noStrike" cap="none" dirty="0">
+              <a:rPr lang="en-US" sz="2800" b="1" i="0" u="none" strike="noStrike" cap="none" dirty="0">
                 <a:solidFill>
                   <a:srgbClr val="FFFF00"/>
                 </a:solidFill>
@@ -17786,7 +17774,7 @@
               <a:buNone/>
             </a:pPr>
             <a:r>
-              <a:rPr lang="en-US" sz="2800" i="0" u="none" strike="noStrike" cap="none" dirty="0">
+              <a:rPr lang="en-US" sz="2800" b="1" i="0" u="none" strike="noStrike" cap="none" dirty="0">
                 <a:solidFill>
                   <a:srgbClr val="FFFF00"/>
                 </a:solidFill>
@@ -18260,7 +18248,7 @@
               <a:buNone/>
             </a:pPr>
             <a:r>
-              <a:rPr lang="en-US" sz="2800" i="0" u="none" strike="noStrike" cap="none" dirty="0">
+              <a:rPr lang="en-US" sz="2800" b="1" i="0" u="none" strike="noStrike" cap="none" dirty="0">
                 <a:solidFill>
                   <a:srgbClr val="FFFF00"/>
                 </a:solidFill>
@@ -18272,7 +18260,7 @@
               <a:t>&gt;&gt;&gt; </a:t>
             </a:r>
             <a:r>
-              <a:rPr lang="en-US" sz="2800" i="0" u="none" strike="noStrike" cap="none" dirty="0" err="1">
+              <a:rPr lang="en-US" sz="2800" b="1" i="0" u="none" strike="noStrike" cap="none" dirty="0" err="1">
                 <a:solidFill>
                   <a:srgbClr val="FFFF00"/>
                 </a:solidFill>
@@ -18284,7 +18272,7 @@
               <a:t>eee</a:t>
             </a:r>
             <a:r>
-              <a:rPr lang="en-US" sz="2800" i="0" u="none" strike="noStrike" cap="none" dirty="0">
+              <a:rPr lang="en-US" sz="2800" b="1" i="0" u="none" strike="noStrike" cap="none" dirty="0">
                 <a:solidFill>
                   <a:srgbClr val="FFFF00"/>
                 </a:solidFill>
@@ -18315,7 +18303,7 @@
               <a:buNone/>
             </a:pPr>
             <a:r>
-              <a:rPr lang="en-US" sz="2800" i="0" u="none" strike="noStrike" cap="none" dirty="0">
+              <a:rPr lang="en-US" sz="2800" b="1" i="0" u="none" strike="noStrike" cap="none" dirty="0">
                 <a:solidFill>
                   <a:srgbClr val="FFFF00"/>
                 </a:solidFill>
@@ -18327,7 +18315,7 @@
               <a:t>&gt;&gt;&gt; </a:t>
             </a:r>
             <a:r>
-              <a:rPr lang="en-US" sz="2800" i="0" u="none" strike="noStrike" cap="none" dirty="0" err="1">
+              <a:rPr lang="en-US" sz="2800" b="1" i="0" u="none" strike="noStrike" cap="none" dirty="0" err="1">
                 <a:solidFill>
                   <a:srgbClr val="00FFFF"/>
                 </a:solidFill>
@@ -18339,7 +18327,7 @@
               <a:t>eee</a:t>
             </a:r>
             <a:r>
-              <a:rPr lang="en-US" sz="2800" i="0" u="none" strike="noStrike" cap="none" dirty="0">
+              <a:rPr lang="en-US" sz="2800" b="1" i="0" u="none" strike="noStrike" cap="none" dirty="0">
                 <a:solidFill>
                   <a:srgbClr val="00FFFF"/>
                 </a:solidFill>
@@ -18351,7 +18339,7 @@
               <a:t> = </a:t>
             </a:r>
             <a:r>
-              <a:rPr lang="en-US" sz="2800" i="0" u="none" strike="noStrike" cap="none" dirty="0" err="1">
+              <a:rPr lang="en-US" sz="2800" b="1" i="0" u="none" strike="noStrike" cap="none" dirty="0" err="1">
                 <a:solidFill>
                   <a:srgbClr val="00FFFF"/>
                 </a:solidFill>
@@ -18363,7 +18351,7 @@
               <a:t>eee</a:t>
             </a:r>
             <a:r>
-              <a:rPr lang="en-US" sz="2800" i="0" u="none" strike="noStrike" cap="none" dirty="0">
+              <a:rPr lang="en-US" sz="2800" b="1" i="0" u="none" strike="noStrike" cap="none" dirty="0">
                 <a:solidFill>
                   <a:srgbClr val="00FFFF"/>
                 </a:solidFill>
@@ -18383,7 +18371,7 @@
               <a:buSzPct val="25000"/>
             </a:pPr>
             <a:r>
-              <a:rPr lang="en-US" sz="2800" dirty="0">
+              <a:rPr lang="en-US" sz="2800" b="1" dirty="0">
                 <a:solidFill>
                   <a:srgbClr val="E06666"/>
                 </a:solidFill>
@@ -18403,7 +18391,7 @@
               <a:buSzPct val="25000"/>
             </a:pPr>
             <a:r>
-              <a:rPr lang="en-US" sz="2800" dirty="0">
+              <a:rPr lang="en-US" sz="2800" b="1" dirty="0">
                 <a:solidFill>
                   <a:srgbClr val="E06666"/>
                 </a:solidFill>
@@ -18423,7 +18411,7 @@
               <a:buSzPct val="25000"/>
             </a:pPr>
             <a:r>
-              <a:rPr lang="en-US" sz="2800" dirty="0" err="1">
+              <a:rPr lang="en-US" sz="2800" b="1" dirty="0" err="1">
                 <a:solidFill>
                   <a:srgbClr val="E06666"/>
                 </a:solidFill>
@@ -18435,7 +18423,7 @@
               <a:t>TypeError</a:t>
             </a:r>
             <a:r>
-              <a:rPr lang="en-US" sz="2800" dirty="0">
+              <a:rPr lang="en-US" sz="2800" b="1" dirty="0">
                 <a:solidFill>
                   <a:srgbClr val="E06666"/>
                 </a:solidFill>
@@ -18455,7 +18443,7 @@
               <a:buSzPct val="25000"/>
             </a:pPr>
             <a:r>
-              <a:rPr lang="en-US" sz="2800" i="0" u="none" strike="noStrike" cap="none" dirty="0">
+              <a:rPr lang="en-US" sz="2800" b="1" i="0" u="none" strike="noStrike" cap="none" dirty="0">
                 <a:solidFill>
                   <a:srgbClr val="FFFF00"/>
                 </a:solidFill>
@@ -18467,7 +18455,7 @@
               <a:t>&gt;&gt;&gt; </a:t>
             </a:r>
             <a:r>
-              <a:rPr lang="en-US" sz="2800" i="0" u="none" strike="noStrike" cap="none" dirty="0">
+              <a:rPr lang="en-US" sz="2800" b="1" i="0" u="none" strike="noStrike" cap="none" dirty="0">
                 <a:solidFill>
                   <a:srgbClr val="00FF00"/>
                 </a:solidFill>
@@ -18479,7 +18467,7 @@
               <a:t>type</a:t>
             </a:r>
             <a:r>
-              <a:rPr lang="en-US" sz="2800" i="0" u="none" strike="noStrike" cap="none" dirty="0">
+              <a:rPr lang="en-US" sz="2800" b="1" i="0" u="none" strike="noStrike" cap="none" dirty="0">
                 <a:solidFill>
                   <a:srgbClr val="FFFF00"/>
                 </a:solidFill>
@@ -18491,7 +18479,7 @@
               <a:t>(</a:t>
             </a:r>
             <a:r>
-              <a:rPr lang="en-US" sz="2800" i="0" u="none" strike="noStrike" cap="none" dirty="0" err="1">
+              <a:rPr lang="en-US" sz="2800" b="1" i="0" u="none" strike="noStrike" cap="none" dirty="0" err="1">
                 <a:solidFill>
                   <a:srgbClr val="FFFF00"/>
                 </a:solidFill>
@@ -18503,7 +18491,7 @@
               <a:t>eee</a:t>
             </a:r>
             <a:r>
-              <a:rPr lang="en-US" sz="2800" i="0" u="none" strike="noStrike" cap="none" dirty="0">
+              <a:rPr lang="en-US" sz="2800" b="1" i="0" u="none" strike="noStrike" cap="none" dirty="0">
                 <a:solidFill>
                   <a:srgbClr val="FFFF00"/>
                 </a:solidFill>
@@ -18534,7 +18522,7 @@
               <a:buNone/>
             </a:pPr>
             <a:r>
-              <a:rPr lang="en-US" sz="2800" i="0" u="none" strike="noStrike" cap="none" dirty="0">
+              <a:rPr lang="en-US" sz="2800" b="1" i="0" u="none" strike="noStrike" cap="none" dirty="0">
                 <a:solidFill>
                   <a:srgbClr val="FFFF00"/>
                 </a:solidFill>
@@ -18546,7 +18534,7 @@
               <a:t>&lt;</a:t>
             </a:r>
             <a:r>
-              <a:rPr lang="en-US" sz="2800" i="0" u="none" strike="noStrike" cap="none" dirty="0" err="1">
+              <a:rPr lang="en-US" sz="2800" b="1" i="0" u="none" strike="noStrike" cap="none" dirty="0" err="1">
                 <a:solidFill>
                   <a:srgbClr val="FFFF00"/>
                 </a:solidFill>
@@ -18558,7 +18546,7 @@
               <a:t>class'str</a:t>
             </a:r>
             <a:r>
-              <a:rPr lang="en-US" sz="2800" i="0" u="none" strike="noStrike" cap="none" dirty="0">
+              <a:rPr lang="en-US" sz="2800" b="1" i="0" u="none" strike="noStrike" cap="none" dirty="0">
                 <a:solidFill>
                   <a:srgbClr val="FFFF00"/>
                 </a:solidFill>
@@ -18589,7 +18577,7 @@
               <a:buNone/>
             </a:pPr>
             <a:r>
-              <a:rPr lang="en-US" sz="2800" i="0" u="none" strike="noStrike" cap="none" dirty="0">
+              <a:rPr lang="en-US" sz="2800" b="1" i="0" u="none" strike="noStrike" cap="none" dirty="0">
                 <a:solidFill>
                   <a:srgbClr val="FFFF00"/>
                 </a:solidFill>
@@ -18601,7 +18589,7 @@
               <a:t>&gt;&gt;&gt; </a:t>
             </a:r>
             <a:r>
-              <a:rPr lang="en-US" sz="2800" i="0" u="none" strike="noStrike" cap="none" dirty="0">
+              <a:rPr lang="en-US" sz="2800" b="1" i="0" u="none" strike="noStrike" cap="none" dirty="0">
                 <a:solidFill>
                   <a:srgbClr val="00FF00"/>
                 </a:solidFill>
@@ -18613,7 +18601,7 @@
               <a:t>type</a:t>
             </a:r>
             <a:r>
-              <a:rPr lang="en-US" sz="2800" i="0" u="none" strike="noStrike" cap="none" dirty="0">
+              <a:rPr lang="en-US" sz="2800" b="1" i="0" u="none" strike="noStrike" cap="none" dirty="0">
                 <a:solidFill>
                   <a:srgbClr val="FFFF00"/>
                 </a:solidFill>
@@ -18644,7 +18632,7 @@
               <a:buNone/>
             </a:pPr>
             <a:r>
-              <a:rPr lang="en-US" sz="2800" i="0" u="none" strike="noStrike" cap="none" dirty="0">
+              <a:rPr lang="en-US" sz="2800" b="1" i="0" u="none" strike="noStrike" cap="none" dirty="0">
                 <a:solidFill>
                   <a:srgbClr val="FFFF00"/>
                 </a:solidFill>
@@ -18656,7 +18644,7 @@
               <a:t>&lt;</a:t>
             </a:r>
             <a:r>
-              <a:rPr lang="en-US" sz="2800" i="0" u="none" strike="noStrike" cap="none" dirty="0" err="1">
+              <a:rPr lang="en-US" sz="2800" b="1" i="0" u="none" strike="noStrike" cap="none" dirty="0" err="1">
                 <a:solidFill>
                   <a:srgbClr val="FFFF00"/>
                 </a:solidFill>
@@ -18668,7 +18656,7 @@
               <a:t>class'str</a:t>
             </a:r>
             <a:r>
-              <a:rPr lang="en-US" sz="2800" i="0" u="none" strike="noStrike" cap="none" dirty="0">
+              <a:rPr lang="en-US" sz="2800" b="1" i="0" u="none" strike="noStrike" cap="none" dirty="0">
                 <a:solidFill>
                   <a:srgbClr val="FFFF00"/>
                 </a:solidFill>
@@ -18699,7 +18687,7 @@
               <a:buNone/>
             </a:pPr>
             <a:r>
-              <a:rPr lang="en-US" sz="2800" i="0" u="none" strike="noStrike" cap="none" dirty="0">
+              <a:rPr lang="en-US" sz="2800" b="1" i="0" u="none" strike="noStrike" cap="none" dirty="0">
                 <a:solidFill>
                   <a:srgbClr val="FFFF00"/>
                 </a:solidFill>
@@ -18711,7 +18699,7 @@
               <a:t>&gt;&gt;&gt; </a:t>
             </a:r>
             <a:r>
-              <a:rPr lang="en-US" sz="2800" i="0" u="none" strike="noStrike" cap="none" dirty="0">
+              <a:rPr lang="en-US" sz="2800" b="1" i="0" u="none" strike="noStrike" cap="none" dirty="0">
                 <a:solidFill>
                   <a:srgbClr val="00FF00"/>
                 </a:solidFill>
@@ -18723,7 +18711,7 @@
               <a:t>type</a:t>
             </a:r>
             <a:r>
-              <a:rPr lang="en-US" sz="2800" i="0" u="none" strike="noStrike" cap="none" dirty="0">
+              <a:rPr lang="en-US" sz="2800" b="1" i="0" u="none" strike="noStrike" cap="none" dirty="0">
                 <a:solidFill>
                   <a:srgbClr val="FFFF00"/>
                 </a:solidFill>
@@ -18754,7 +18742,7 @@
               <a:buNone/>
             </a:pPr>
             <a:r>
-              <a:rPr lang="en-US" sz="2800" i="0" u="none" strike="noStrike" cap="none" dirty="0">
+              <a:rPr lang="en-US" sz="2800" b="1" i="0" u="none" strike="noStrike" cap="none" dirty="0">
                 <a:solidFill>
                   <a:srgbClr val="FFFF00"/>
                 </a:solidFill>
@@ -18766,7 +18754,7 @@
               <a:t>&lt;</a:t>
             </a:r>
             <a:r>
-              <a:rPr lang="en-US" sz="2800" i="0" u="none" strike="noStrike" cap="none" dirty="0" err="1">
+              <a:rPr lang="en-US" sz="2800" b="1" i="0" u="none" strike="noStrike" cap="none" dirty="0" err="1">
                 <a:solidFill>
                   <a:srgbClr val="FFFF00"/>
                 </a:solidFill>
@@ -18778,7 +18766,7 @@
               <a:t>class'int</a:t>
             </a:r>
             <a:r>
-              <a:rPr lang="en-US" sz="2800" i="0" u="none" strike="noStrike" cap="none" dirty="0">
+              <a:rPr lang="en-US" sz="2800" b="1" i="0" u="none" strike="noStrike" cap="none" dirty="0">
                 <a:solidFill>
                   <a:srgbClr val="FFFF00"/>
                 </a:solidFill>
@@ -18809,7 +18797,7 @@
               <a:buNone/>
             </a:pPr>
             <a:r>
-              <a:rPr lang="en-US" sz="2800" i="0" u="none" strike="noStrike" cap="none" dirty="0">
+              <a:rPr lang="en-US" sz="2800" b="1" i="0" u="none" strike="noStrike" cap="none" dirty="0">
                 <a:solidFill>
                   <a:srgbClr val="FFFF00"/>
                 </a:solidFill>
@@ -19171,7 +19159,7 @@
               <a:buNone/>
             </a:pPr>
             <a:r>
-              <a:rPr lang="en-US" sz="3400" i="0" u="none" strike="noStrike" cap="none" dirty="0">
+              <a:rPr lang="en-US" sz="3400" b="1" i="0" u="none" strike="noStrike" cap="none" dirty="0">
                 <a:solidFill>
                   <a:schemeClr val="lt1"/>
                 </a:solidFill>
@@ -19183,7 +19171,7 @@
               <a:t>&gt;&gt;&gt; </a:t>
             </a:r>
             <a:r>
-              <a:rPr lang="en-US" sz="3400" i="0" u="none" strike="noStrike" cap="none" dirty="0">
+              <a:rPr lang="en-US" sz="3400" b="1" i="0" u="none" strike="noStrike" cap="none" dirty="0">
                 <a:solidFill>
                   <a:srgbClr val="00FF00"/>
                 </a:solidFill>
@@ -19195,7 +19183,7 @@
               <a:t>xx</a:t>
             </a:r>
             <a:r>
-              <a:rPr lang="en-US" sz="3400" i="0" u="none" strike="noStrike" cap="none" dirty="0">
+              <a:rPr lang="en-US" sz="3400" b="1" i="0" u="none" strike="noStrike" cap="none" dirty="0">
                 <a:solidFill>
                   <a:schemeClr val="lt1"/>
                 </a:solidFill>
@@ -19226,7 +19214,7 @@
               <a:buNone/>
             </a:pPr>
             <a:r>
-              <a:rPr lang="en-US" sz="3400" i="0" u="none" strike="noStrike" cap="none" dirty="0">
+              <a:rPr lang="en-US" sz="3400" b="1" i="0" u="none" strike="noStrike" cap="none" dirty="0">
                 <a:solidFill>
                   <a:schemeClr val="lt1"/>
                 </a:solidFill>
@@ -19238,7 +19226,7 @@
               <a:t>&gt;&gt;&gt; </a:t>
             </a:r>
             <a:r>
-              <a:rPr lang="en-US" sz="3400" i="0" u="none" strike="noStrike" cap="none" dirty="0">
+              <a:rPr lang="en-US" sz="3400" b="1" i="0" u="none" strike="noStrike" cap="none" dirty="0">
                 <a:solidFill>
                   <a:srgbClr val="FFFF00"/>
                 </a:solidFill>
@@ -19250,7 +19238,7 @@
               <a:t>type</a:t>
             </a:r>
             <a:r>
-              <a:rPr lang="en-US" sz="3400" i="0" u="none" strike="noStrike" cap="none" dirty="0">
+              <a:rPr lang="en-US" sz="3400" b="1" i="0" u="none" strike="noStrike" cap="none" dirty="0">
                 <a:solidFill>
                   <a:schemeClr val="lt1"/>
                 </a:solidFill>
@@ -19262,7 +19250,7 @@
               <a:t> (</a:t>
             </a:r>
             <a:r>
-              <a:rPr lang="en-US" sz="3400" i="0" u="none" strike="noStrike" cap="none" dirty="0">
+              <a:rPr lang="en-US" sz="3400" b="1" i="0" u="none" strike="noStrike" cap="none" dirty="0">
                 <a:solidFill>
                   <a:srgbClr val="00FF00"/>
                 </a:solidFill>
@@ -19274,7 +19262,7 @@
               <a:t>xx</a:t>
             </a:r>
             <a:r>
-              <a:rPr lang="en-US" sz="3400" i="0" u="none" strike="noStrike" cap="none" dirty="0">
+              <a:rPr lang="en-US" sz="3400" b="1" i="0" u="none" strike="noStrike" cap="none" dirty="0">
                 <a:solidFill>
                   <a:schemeClr val="lt1"/>
                 </a:solidFill>
@@ -19305,7 +19293,7 @@
               <a:buNone/>
             </a:pPr>
             <a:r>
-              <a:rPr lang="en-US" sz="3400" i="0" u="none" strike="noStrike" cap="none" dirty="0">
+              <a:rPr lang="en-US" sz="3400" b="1" i="0" u="none" strike="noStrike" cap="none" dirty="0">
                 <a:solidFill>
                   <a:schemeClr val="lt1"/>
                 </a:solidFill>
@@ -19317,7 +19305,7 @@
               <a:t>&lt;class '</a:t>
             </a:r>
             <a:r>
-              <a:rPr lang="en-US" sz="3400" i="0" u="none" strike="noStrike" cap="none" dirty="0" err="1">
+              <a:rPr lang="en-US" sz="3400" b="1" i="0" u="none" strike="noStrike" cap="none" dirty="0" err="1">
                 <a:solidFill>
                   <a:schemeClr val="lt1"/>
                 </a:solidFill>
@@ -19329,7 +19317,7 @@
               <a:t>int</a:t>
             </a:r>
             <a:r>
-              <a:rPr lang="en-US" sz="3400" i="0" u="none" strike="noStrike" cap="none" dirty="0">
+              <a:rPr lang="en-US" sz="3400" b="1" i="0" u="none" strike="noStrike" cap="none" dirty="0">
                 <a:solidFill>
                   <a:schemeClr val="lt1"/>
                 </a:solidFill>
@@ -19360,7 +19348,7 @@
               <a:buNone/>
             </a:pPr>
             <a:r>
-              <a:rPr lang="en-US" sz="3400" i="0" u="none" strike="noStrike" cap="none" dirty="0">
+              <a:rPr lang="en-US" sz="3400" b="1" i="0" u="none" strike="noStrike" cap="none" dirty="0">
                 <a:solidFill>
                   <a:schemeClr val="lt1"/>
                 </a:solidFill>
@@ -19372,7 +19360,7 @@
               <a:t>&gt;&gt;&gt; </a:t>
             </a:r>
             <a:r>
-              <a:rPr lang="en-US" sz="3400" i="0" u="none" strike="noStrike" cap="none" dirty="0">
+              <a:rPr lang="en-US" sz="3400" b="1" i="0" u="none" strike="noStrike" cap="none" dirty="0">
                 <a:solidFill>
                   <a:srgbClr val="00FF00"/>
                 </a:solidFill>
@@ -19384,7 +19372,7 @@
               <a:t>temp</a:t>
             </a:r>
             <a:r>
-              <a:rPr lang="en-US" sz="3400" i="0" u="none" strike="noStrike" cap="none" dirty="0">
+              <a:rPr lang="en-US" sz="3400" b="1" i="0" u="none" strike="noStrike" cap="none" dirty="0">
                 <a:solidFill>
                   <a:schemeClr val="lt1"/>
                 </a:solidFill>
@@ -19415,7 +19403,7 @@
               <a:buNone/>
             </a:pPr>
             <a:r>
-              <a:rPr lang="en-US" sz="3400" i="0" u="none" strike="noStrike" cap="none" dirty="0">
+              <a:rPr lang="en-US" sz="3400" b="1" i="0" u="none" strike="noStrike" cap="none" dirty="0">
                 <a:solidFill>
                   <a:schemeClr val="lt1"/>
                 </a:solidFill>
@@ -19427,7 +19415,7 @@
               <a:t>&gt;&gt;&gt; </a:t>
             </a:r>
             <a:r>
-              <a:rPr lang="en-US" sz="3400" i="0" u="none" strike="noStrike" cap="none" dirty="0">
+              <a:rPr lang="en-US" sz="3400" b="1" i="0" u="none" strike="noStrike" cap="none" dirty="0">
                 <a:solidFill>
                   <a:srgbClr val="FFFF00"/>
                 </a:solidFill>
@@ -19439,7 +19427,7 @@
               <a:t>type</a:t>
             </a:r>
             <a:r>
-              <a:rPr lang="en-US" sz="3400" i="0" u="none" strike="noStrike" cap="none" dirty="0">
+              <a:rPr lang="en-US" sz="3400" b="1" i="0" u="none" strike="noStrike" cap="none" dirty="0">
                 <a:solidFill>
                   <a:schemeClr val="lt1"/>
                 </a:solidFill>
@@ -19451,7 +19439,7 @@
               <a:t>(</a:t>
             </a:r>
             <a:r>
-              <a:rPr lang="en-US" sz="3400" i="0" u="none" strike="noStrike" cap="none" dirty="0">
+              <a:rPr lang="en-US" sz="3400" b="1" i="0" u="none" strike="noStrike" cap="none" dirty="0">
                 <a:solidFill>
                   <a:srgbClr val="00FF00"/>
                 </a:solidFill>
@@ -19463,7 +19451,7 @@
               <a:t>temp</a:t>
             </a:r>
             <a:r>
-              <a:rPr lang="en-US" sz="3400" i="0" u="none" strike="noStrike" cap="none" dirty="0">
+              <a:rPr lang="en-US" sz="3400" b="1" i="0" u="none" strike="noStrike" cap="none" dirty="0">
                 <a:solidFill>
                   <a:schemeClr val="lt1"/>
                 </a:solidFill>
@@ -19494,7 +19482,7 @@
               <a:buNone/>
             </a:pPr>
             <a:r>
-              <a:rPr lang="en-US" sz="3400" i="0" u="none" strike="noStrike" cap="none" dirty="0">
+              <a:rPr lang="en-US" sz="3400" b="1" i="0" u="none" strike="noStrike" cap="none" dirty="0">
                 <a:solidFill>
                   <a:schemeClr val="lt1"/>
                 </a:solidFill>
@@ -19506,7 +19494,7 @@
               <a:t>&lt;</a:t>
             </a:r>
             <a:r>
-              <a:rPr lang="en-US" sz="3400" i="0" u="none" strike="noStrike" cap="none" dirty="0" err="1">
+              <a:rPr lang="en-US" sz="3400" b="1" i="0" u="none" strike="noStrike" cap="none" dirty="0" err="1">
                 <a:solidFill>
                   <a:schemeClr val="lt1"/>
                 </a:solidFill>
@@ -19518,7 +19506,7 @@
               <a:t>class'float</a:t>
             </a:r>
             <a:r>
-              <a:rPr lang="en-US" sz="3400" i="0" u="none" strike="noStrike" cap="none" dirty="0">
+              <a:rPr lang="en-US" sz="3400" b="1" i="0" u="none" strike="noStrike" cap="none" dirty="0">
                 <a:solidFill>
                   <a:schemeClr val="lt1"/>
                 </a:solidFill>
@@ -19549,7 +19537,7 @@
               <a:buNone/>
             </a:pPr>
             <a:r>
-              <a:rPr lang="en-US" sz="3400" i="0" u="none" strike="noStrike" cap="none" dirty="0">
+              <a:rPr lang="en-US" sz="3400" b="1" i="0" u="none" strike="noStrike" cap="none" dirty="0">
                 <a:solidFill>
                   <a:schemeClr val="lt1"/>
                 </a:solidFill>
@@ -19561,7 +19549,7 @@
               <a:t>&gt;&gt;&gt; </a:t>
             </a:r>
             <a:r>
-              <a:rPr lang="en-US" sz="3400" i="0" u="none" strike="noStrike" cap="none" dirty="0">
+              <a:rPr lang="en-US" sz="3400" b="1" i="0" u="none" strike="noStrike" cap="none" dirty="0">
                 <a:solidFill>
                   <a:srgbClr val="FFFF00"/>
                 </a:solidFill>
@@ -19573,7 +19561,7 @@
               <a:t>type</a:t>
             </a:r>
             <a:r>
-              <a:rPr lang="en-US" sz="3400" i="0" u="none" strike="noStrike" cap="none" dirty="0">
+              <a:rPr lang="en-US" sz="3400" b="1" i="0" u="none" strike="noStrike" cap="none" dirty="0">
                 <a:solidFill>
                   <a:schemeClr val="lt1"/>
                 </a:solidFill>
@@ -19604,7 +19592,7 @@
               <a:buNone/>
             </a:pPr>
             <a:r>
-              <a:rPr lang="en-US" sz="3400" i="0" u="none" strike="noStrike" cap="none" dirty="0">
+              <a:rPr lang="en-US" sz="3400" b="1" i="0" u="none" strike="noStrike" cap="none" dirty="0">
                 <a:solidFill>
                   <a:schemeClr val="lt1"/>
                 </a:solidFill>
@@ -19616,7 +19604,7 @@
               <a:t>&lt;class '</a:t>
             </a:r>
             <a:r>
-              <a:rPr lang="en-US" sz="3400" i="0" u="none" strike="noStrike" cap="none" dirty="0" err="1">
+              <a:rPr lang="en-US" sz="3400" b="1" i="0" u="none" strike="noStrike" cap="none" dirty="0" err="1">
                 <a:solidFill>
                   <a:schemeClr val="lt1"/>
                 </a:solidFill>
@@ -19628,7 +19616,7 @@
               <a:t>int</a:t>
             </a:r>
             <a:r>
-              <a:rPr lang="en-US" sz="3400" i="0" u="none" strike="noStrike" cap="none" dirty="0">
+              <a:rPr lang="en-US" sz="3400" b="1" i="0" u="none" strike="noStrike" cap="none" dirty="0">
                 <a:solidFill>
                   <a:schemeClr val="lt1"/>
                 </a:solidFill>
@@ -19659,7 +19647,7 @@
               <a:buNone/>
             </a:pPr>
             <a:r>
-              <a:rPr lang="en-US" sz="3400" i="0" u="none" strike="noStrike" cap="none" dirty="0">
+              <a:rPr lang="en-US" sz="3400" b="1" i="0" u="none" strike="noStrike" cap="none" dirty="0">
                 <a:solidFill>
                   <a:schemeClr val="lt1"/>
                 </a:solidFill>
@@ -19671,7 +19659,7 @@
               <a:t>&gt;&gt;&gt; </a:t>
             </a:r>
             <a:r>
-              <a:rPr lang="en-US" sz="3400" i="0" u="none" strike="noStrike" cap="none" dirty="0">
+              <a:rPr lang="en-US" sz="3400" b="1" i="0" u="none" strike="noStrike" cap="none" dirty="0">
                 <a:solidFill>
                   <a:srgbClr val="FFFF00"/>
                 </a:solidFill>
@@ -19683,7 +19671,7 @@
               <a:t>type</a:t>
             </a:r>
             <a:r>
-              <a:rPr lang="en-US" sz="3400" i="0" u="none" strike="noStrike" cap="none" dirty="0">
+              <a:rPr lang="en-US" sz="3400" b="1" i="0" u="none" strike="noStrike" cap="none" dirty="0">
                 <a:solidFill>
                   <a:schemeClr val="lt1"/>
                 </a:solidFill>
@@ -19714,7 +19702,7 @@
               <a:buNone/>
             </a:pPr>
             <a:r>
-              <a:rPr lang="en-US" sz="3400" i="0" u="none" strike="noStrike" cap="none" dirty="0">
+              <a:rPr lang="en-US" sz="3400" b="1" i="0" u="none" strike="noStrike" cap="none" dirty="0">
                 <a:solidFill>
                   <a:schemeClr val="lt1"/>
                 </a:solidFill>
@@ -19726,7 +19714,7 @@
               <a:t>&lt;</a:t>
             </a:r>
             <a:r>
-              <a:rPr lang="en-US" sz="3400" i="0" u="none" strike="noStrike" cap="none" dirty="0" err="1">
+              <a:rPr lang="en-US" sz="3400" b="1" i="0" u="none" strike="noStrike" cap="none" dirty="0" err="1">
                 <a:solidFill>
                   <a:schemeClr val="lt1"/>
                 </a:solidFill>
@@ -19738,7 +19726,7 @@
               <a:t>class'float</a:t>
             </a:r>
             <a:r>
-              <a:rPr lang="en-US" sz="3400" i="0" u="none" strike="noStrike" cap="none" dirty="0">
+              <a:rPr lang="en-US" sz="3400" b="1" i="0" u="none" strike="noStrike" cap="none" dirty="0">
                 <a:solidFill>
                   <a:schemeClr val="lt1"/>
                 </a:solidFill>
@@ -19769,7 +19757,7 @@
               <a:buNone/>
             </a:pPr>
             <a:r>
-              <a:rPr lang="en-US" sz="3400" i="0" u="none" strike="noStrike" cap="none" dirty="0">
+              <a:rPr lang="en-US" sz="3400" b="1" i="0" u="none" strike="noStrike" cap="none" dirty="0">
                 <a:solidFill>
                   <a:schemeClr val="lt1"/>
                 </a:solidFill>
@@ -20061,7 +20049,7 @@
               <a:buSzPct val="25000"/>
             </a:pPr>
             <a:r>
-              <a:rPr lang="en-US" sz="3200" i="0" u="none" strike="noStrike" cap="none" dirty="0">
+              <a:rPr lang="en-US" sz="3200" b="1" i="0" u="none" strike="noStrike" cap="none" dirty="0">
                 <a:solidFill>
                   <a:schemeClr val="lt1"/>
                 </a:solidFill>
@@ -20073,7 +20061,7 @@
               <a:t>&gt;&gt;&gt; </a:t>
             </a:r>
             <a:r>
-              <a:rPr lang="en-US" sz="3200" i="0" u="none" strike="noStrike" cap="none" dirty="0">
+              <a:rPr lang="en-US" sz="3200" b="1" i="0" u="none" strike="noStrike" cap="none" dirty="0">
                 <a:solidFill>
                   <a:srgbClr val="FFFF00"/>
                 </a:solidFill>
@@ -20085,7 +20073,7 @@
               <a:t>print(</a:t>
             </a:r>
             <a:r>
-              <a:rPr lang="en-US" sz="3200" i="0" u="none" strike="noStrike" cap="none" dirty="0">
+              <a:rPr lang="en-US" sz="3200" b="1" i="0" u="none" strike="noStrike" cap="none" dirty="0">
                 <a:solidFill>
                   <a:srgbClr val="00FF00"/>
                 </a:solidFill>
@@ -20097,7 +20085,7 @@
               <a:t>float</a:t>
             </a:r>
             <a:r>
-              <a:rPr lang="en-US" sz="3200" i="0" u="none" strike="noStrike" cap="none" dirty="0">
+              <a:rPr lang="en-US" sz="3200" b="1" i="0" u="none" strike="noStrike" cap="none" dirty="0">
                 <a:solidFill>
                   <a:schemeClr val="lt1"/>
                 </a:solidFill>
@@ -20109,7 +20097,7 @@
               <a:t>(99) </a:t>
             </a:r>
             <a:r>
-              <a:rPr lang="en-US" sz="3200" i="0" u="none" strike="noStrike" cap="none" dirty="0">
+              <a:rPr lang="en-US" sz="3200" b="1" i="0" u="none" strike="noStrike" cap="none" dirty="0">
                 <a:solidFill>
                   <a:srgbClr val="00FFFF"/>
                 </a:solidFill>
@@ -20121,7 +20109,7 @@
               <a:t>+</a:t>
             </a:r>
             <a:r>
-              <a:rPr lang="en-US" sz="3200" i="0" u="none" strike="noStrike" cap="none" dirty="0">
+              <a:rPr lang="en-US" sz="3200" b="1" i="0" u="none" strike="noStrike" cap="none" dirty="0">
                 <a:solidFill>
                   <a:schemeClr val="lt1"/>
                 </a:solidFill>
@@ -20133,7 +20121,7 @@
               <a:t> 100</a:t>
             </a:r>
             <a:r>
-              <a:rPr lang="en-US" sz="3200" dirty="0">
+              <a:rPr lang="en-US" sz="3200" b="1" dirty="0">
                 <a:solidFill>
                   <a:srgbClr val="FFFF00"/>
                 </a:solidFill>
@@ -20144,7 +20132,7 @@
               </a:rPr>
               <a:t>)</a:t>
             </a:r>
-            <a:endParaRPr lang="en-US" sz="3200" i="0" u="none" strike="noStrike" cap="none" dirty="0">
+            <a:endParaRPr lang="en-US" sz="3200" b="1" i="0" u="none" strike="noStrike" cap="none" dirty="0">
               <a:solidFill>
                 <a:schemeClr val="lt1"/>
               </a:solidFill>
@@ -20173,7 +20161,7 @@
               <a:buNone/>
             </a:pPr>
             <a:r>
-              <a:rPr lang="en-US" sz="3200" i="0" u="none" strike="noStrike" cap="none" dirty="0">
+              <a:rPr lang="en-US" sz="3200" b="1" i="0" u="none" strike="noStrike" cap="none" dirty="0">
                 <a:solidFill>
                   <a:schemeClr val="lt1"/>
                 </a:solidFill>
@@ -20204,7 +20192,7 @@
               <a:buNone/>
             </a:pPr>
             <a:r>
-              <a:rPr lang="en-US" sz="3200" i="0" u="none" strike="noStrike" cap="none" dirty="0">
+              <a:rPr lang="en-US" sz="3200" b="1" i="0" u="none" strike="noStrike" cap="none" dirty="0">
                 <a:solidFill>
                   <a:schemeClr val="lt1"/>
                 </a:solidFill>
@@ -20216,7 +20204,7 @@
               <a:t>&gt;&gt;&gt; </a:t>
             </a:r>
             <a:r>
-              <a:rPr lang="en-US" sz="3200" i="0" u="none" strike="noStrike" cap="none" dirty="0" err="1">
+              <a:rPr lang="en-US" sz="3200" b="1" i="0" u="none" strike="noStrike" cap="none" dirty="0" err="1">
                 <a:solidFill>
                   <a:schemeClr val="lt1"/>
                 </a:solidFill>
@@ -20228,7 +20216,7 @@
               <a:t>i</a:t>
             </a:r>
             <a:r>
-              <a:rPr lang="en-US" sz="3200" i="0" u="none" strike="noStrike" cap="none" dirty="0">
+              <a:rPr lang="en-US" sz="3200" b="1" i="0" u="none" strike="noStrike" cap="none" dirty="0">
                 <a:solidFill>
                   <a:schemeClr val="lt1"/>
                 </a:solidFill>
@@ -20259,7 +20247,7 @@
               <a:buNone/>
             </a:pPr>
             <a:r>
-              <a:rPr lang="en-US" sz="3200" i="0" u="none" strike="noStrike" cap="none" dirty="0">
+              <a:rPr lang="en-US" sz="3200" b="1" i="0" u="none" strike="noStrike" cap="none" dirty="0">
                 <a:solidFill>
                   <a:schemeClr val="lt1"/>
                 </a:solidFill>
@@ -20271,7 +20259,7 @@
               <a:t>&gt;&gt;&gt; </a:t>
             </a:r>
             <a:r>
-              <a:rPr lang="en-US" sz="3200" i="0" u="none" strike="noStrike" cap="none" dirty="0">
+              <a:rPr lang="en-US" sz="3200" b="1" i="0" u="none" strike="noStrike" cap="none" dirty="0">
                 <a:solidFill>
                   <a:srgbClr val="00FF00"/>
                 </a:solidFill>
@@ -20283,7 +20271,7 @@
               <a:t>type</a:t>
             </a:r>
             <a:r>
-              <a:rPr lang="en-US" sz="3200" i="0" u="none" strike="noStrike" cap="none" dirty="0">
+              <a:rPr lang="en-US" sz="3200" b="1" i="0" u="none" strike="noStrike" cap="none" dirty="0">
                 <a:solidFill>
                   <a:schemeClr val="lt1"/>
                 </a:solidFill>
@@ -20295,7 +20283,7 @@
               <a:t>(</a:t>
             </a:r>
             <a:r>
-              <a:rPr lang="en-US" sz="3200" i="0" u="none" strike="noStrike" cap="none" dirty="0" err="1">
+              <a:rPr lang="en-US" sz="3200" b="1" i="0" u="none" strike="noStrike" cap="none" dirty="0" err="1">
                 <a:solidFill>
                   <a:schemeClr val="lt1"/>
                 </a:solidFill>
@@ -20307,7 +20295,7 @@
               <a:t>i</a:t>
             </a:r>
             <a:r>
-              <a:rPr lang="en-US" sz="3200" i="0" u="none" strike="noStrike" cap="none" dirty="0">
+              <a:rPr lang="en-US" sz="3200" b="1" i="0" u="none" strike="noStrike" cap="none" dirty="0">
                 <a:solidFill>
                   <a:schemeClr val="lt1"/>
                 </a:solidFill>
@@ -20338,7 +20326,7 @@
               <a:buNone/>
             </a:pPr>
             <a:r>
-              <a:rPr lang="en-US" sz="3200" i="0" u="none" strike="noStrike" cap="none" dirty="0">
+              <a:rPr lang="en-US" sz="3200" b="1" i="0" u="none" strike="noStrike" cap="none" dirty="0">
                 <a:solidFill>
                   <a:schemeClr val="lt1"/>
                 </a:solidFill>
@@ -20350,7 +20338,7 @@
               <a:t>&lt;</a:t>
             </a:r>
             <a:r>
-              <a:rPr lang="en-US" sz="3200" i="0" u="none" strike="noStrike" cap="none" dirty="0" err="1">
+              <a:rPr lang="en-US" sz="3200" b="1" i="0" u="none" strike="noStrike" cap="none" dirty="0" err="1">
                 <a:solidFill>
                   <a:schemeClr val="lt1"/>
                 </a:solidFill>
@@ -20362,7 +20350,7 @@
               <a:t>class'int</a:t>
             </a:r>
             <a:r>
-              <a:rPr lang="en-US" sz="3200" i="0" u="none" strike="noStrike" cap="none" dirty="0">
+              <a:rPr lang="en-US" sz="3200" b="1" i="0" u="none" strike="noStrike" cap="none" dirty="0">
                 <a:solidFill>
                   <a:schemeClr val="lt1"/>
                 </a:solidFill>
@@ -20393,7 +20381,7 @@
               <a:buNone/>
             </a:pPr>
             <a:r>
-              <a:rPr lang="en-US" sz="3200" i="0" u="none" strike="noStrike" cap="none" dirty="0">
+              <a:rPr lang="en-US" sz="3200" b="1" i="0" u="none" strike="noStrike" cap="none" dirty="0">
                 <a:solidFill>
                   <a:schemeClr val="lt1"/>
                 </a:solidFill>
@@ -20405,7 +20393,7 @@
               <a:t>&gt;&gt;&gt; f = </a:t>
             </a:r>
             <a:r>
-              <a:rPr lang="en-US" sz="3200" i="0" u="none" strike="noStrike" cap="none" dirty="0">
+              <a:rPr lang="en-US" sz="3200" b="1" i="0" u="none" strike="noStrike" cap="none" dirty="0">
                 <a:solidFill>
                   <a:srgbClr val="00FF00"/>
                 </a:solidFill>
@@ -20417,7 +20405,7 @@
               <a:t>float</a:t>
             </a:r>
             <a:r>
-              <a:rPr lang="en-US" sz="3200" i="0" u="none" strike="noStrike" cap="none" dirty="0">
+              <a:rPr lang="en-US" sz="3200" b="1" i="0" u="none" strike="noStrike" cap="none" dirty="0">
                 <a:solidFill>
                   <a:schemeClr val="lt1"/>
                 </a:solidFill>
@@ -20429,7 +20417,7 @@
               <a:t>(</a:t>
             </a:r>
             <a:r>
-              <a:rPr lang="en-US" sz="3200" i="0" u="none" strike="noStrike" cap="none" dirty="0" err="1">
+              <a:rPr lang="en-US" sz="3200" b="1" i="0" u="none" strike="noStrike" cap="none" dirty="0" err="1">
                 <a:solidFill>
                   <a:schemeClr val="lt1"/>
                 </a:solidFill>
@@ -20441,7 +20429,7 @@
               <a:t>i</a:t>
             </a:r>
             <a:r>
-              <a:rPr lang="en-US" sz="3200" i="0" u="none" strike="noStrike" cap="none" dirty="0">
+              <a:rPr lang="en-US" sz="3200" b="1" i="0" u="none" strike="noStrike" cap="none" dirty="0">
                 <a:solidFill>
                   <a:schemeClr val="lt1"/>
                 </a:solidFill>
@@ -20461,7 +20449,7 @@
               <a:buSzPct val="25000"/>
             </a:pPr>
             <a:r>
-              <a:rPr lang="en-US" sz="3200" i="0" u="none" strike="noStrike" cap="none" dirty="0">
+              <a:rPr lang="en-US" sz="3200" b="1" i="0" u="none" strike="noStrike" cap="none" dirty="0">
                 <a:solidFill>
                   <a:schemeClr val="lt1"/>
                 </a:solidFill>
@@ -20473,7 +20461,7 @@
               <a:t>&gt;&gt;&gt; </a:t>
             </a:r>
             <a:r>
-              <a:rPr lang="en-US" sz="3200" i="0" u="none" strike="noStrike" cap="none" dirty="0">
+              <a:rPr lang="en-US" sz="3200" b="1" i="0" u="none" strike="noStrike" cap="none" dirty="0">
                 <a:solidFill>
                   <a:srgbClr val="FFFF00"/>
                 </a:solidFill>
@@ -20485,7 +20473,7 @@
               <a:t>print(</a:t>
             </a:r>
             <a:r>
-              <a:rPr lang="en-US" sz="3200" i="0" u="none" strike="noStrike" cap="none" dirty="0">
+              <a:rPr lang="en-US" sz="3200" b="1" i="0" u="none" strike="noStrike" cap="none" dirty="0">
                 <a:solidFill>
                   <a:schemeClr val="lt1"/>
                 </a:solidFill>
@@ -20497,7 +20485,7 @@
               <a:t>f</a:t>
             </a:r>
             <a:r>
-              <a:rPr lang="en-US" sz="3200" dirty="0">
+              <a:rPr lang="en-US" sz="3200" b="1" dirty="0">
                 <a:solidFill>
                   <a:srgbClr val="FFFF00"/>
                 </a:solidFill>
@@ -20508,7 +20496,7 @@
               </a:rPr>
               <a:t>)</a:t>
             </a:r>
-            <a:endParaRPr lang="en-US" sz="3200" i="0" u="none" strike="noStrike" cap="none" dirty="0">
+            <a:endParaRPr lang="en-US" sz="3200" b="1" i="0" u="none" strike="noStrike" cap="none" dirty="0">
               <a:solidFill>
                 <a:schemeClr val="lt1"/>
               </a:solidFill>
@@ -20537,7 +20525,7 @@
               <a:buNone/>
             </a:pPr>
             <a:r>
-              <a:rPr lang="en-US" sz="3200" i="0" u="none" strike="noStrike" cap="none" dirty="0">
+              <a:rPr lang="en-US" sz="3200" b="1" i="0" u="none" strike="noStrike" cap="none" dirty="0">
                 <a:solidFill>
                   <a:schemeClr val="lt1"/>
                 </a:solidFill>
@@ -20568,7 +20556,7 @@
               <a:buNone/>
             </a:pPr>
             <a:r>
-              <a:rPr lang="en-US" sz="3200" i="0" u="none" strike="noStrike" cap="none" dirty="0">
+              <a:rPr lang="en-US" sz="3200" b="1" i="0" u="none" strike="noStrike" cap="none" dirty="0">
                 <a:solidFill>
                   <a:schemeClr val="lt1"/>
                 </a:solidFill>
@@ -20580,7 +20568,7 @@
               <a:t>&gt;&gt;&gt; </a:t>
             </a:r>
             <a:r>
-              <a:rPr lang="en-US" sz="3200" i="0" u="none" strike="noStrike" cap="none" dirty="0">
+              <a:rPr lang="en-US" sz="3200" b="1" i="0" u="none" strike="noStrike" cap="none" dirty="0">
                 <a:solidFill>
                   <a:srgbClr val="00FF00"/>
                 </a:solidFill>
@@ -20592,7 +20580,7 @@
               <a:t>type</a:t>
             </a:r>
             <a:r>
-              <a:rPr lang="en-US" sz="3200" i="0" u="none" strike="noStrike" cap="none" dirty="0">
+              <a:rPr lang="en-US" sz="3200" b="1" i="0" u="none" strike="noStrike" cap="none" dirty="0">
                 <a:solidFill>
                   <a:schemeClr val="lt1"/>
                 </a:solidFill>
@@ -20623,7 +20611,7 @@
               <a:buNone/>
             </a:pPr>
             <a:r>
-              <a:rPr lang="en-US" sz="3200" i="0" u="none" strike="noStrike" cap="none" dirty="0">
+              <a:rPr lang="en-US" sz="3200" b="1" i="0" u="none" strike="noStrike" cap="none" dirty="0">
                 <a:solidFill>
                   <a:schemeClr val="lt1"/>
                 </a:solidFill>
@@ -20635,7 +20623,7 @@
               <a:t>&lt;</a:t>
             </a:r>
             <a:r>
-              <a:rPr lang="en-US" sz="3200" i="0" u="none" strike="noStrike" cap="none" dirty="0" err="1">
+              <a:rPr lang="en-US" sz="3200" b="1" i="0" u="none" strike="noStrike" cap="none" dirty="0" err="1">
                 <a:solidFill>
                   <a:schemeClr val="lt1"/>
                 </a:solidFill>
@@ -20647,7 +20635,7 @@
               <a:t>class'float</a:t>
             </a:r>
             <a:r>
-              <a:rPr lang="en-US" sz="3200" i="0" u="none" strike="noStrike" cap="none" dirty="0">
+              <a:rPr lang="en-US" sz="3200" b="1" i="0" u="none" strike="noStrike" cap="none" dirty="0">
                 <a:solidFill>
                   <a:schemeClr val="lt1"/>
                 </a:solidFill>
@@ -20678,7 +20666,7 @@
               <a:buNone/>
             </a:pPr>
             <a:r>
-              <a:rPr lang="en-US" sz="3200" i="0" u="none" strike="noStrike" cap="none" dirty="0">
+              <a:rPr lang="en-US" sz="3200" b="1" i="0" u="none" strike="noStrike" cap="none" dirty="0">
                 <a:solidFill>
                   <a:schemeClr val="lt1"/>
                 </a:solidFill>
@@ -20870,7 +20858,7 @@
               <a:buSzPct val="25000"/>
             </a:pPr>
             <a:r>
-              <a:rPr lang="en-US" sz="3000" i="0" u="none" strike="noStrike" cap="none" dirty="0">
+              <a:rPr lang="en-US" sz="3000" b="1" i="0" u="none" strike="noStrike" cap="none" dirty="0">
                 <a:solidFill>
                   <a:schemeClr val="lt1"/>
                 </a:solidFill>
@@ -20882,7 +20870,7 @@
               <a:t>&gt;&gt;&gt; </a:t>
             </a:r>
             <a:r>
-              <a:rPr lang="en-US" sz="3000" i="0" u="none" strike="noStrike" cap="none" dirty="0">
+              <a:rPr lang="en-US" sz="3000" b="1" i="0" u="none" strike="noStrike" cap="none" dirty="0">
                 <a:solidFill>
                   <a:srgbClr val="FFFF00"/>
                 </a:solidFill>
@@ -20894,7 +20882,7 @@
               <a:t>print(</a:t>
             </a:r>
             <a:r>
-              <a:rPr lang="en-US" sz="3000" i="0" u="none" strike="noStrike" cap="none" dirty="0">
+              <a:rPr lang="en-US" sz="3000" b="1" i="0" u="none" strike="noStrike" cap="none" dirty="0">
                 <a:solidFill>
                   <a:schemeClr val="lt1"/>
                 </a:solidFill>
@@ -20906,7 +20894,7 @@
               <a:t>10 </a:t>
             </a:r>
             <a:r>
-              <a:rPr lang="en-US" sz="3000" i="0" u="none" strike="noStrike" cap="none" dirty="0">
+              <a:rPr lang="en-US" sz="3000" b="1" i="0" u="none" strike="noStrike" cap="none" dirty="0">
                 <a:solidFill>
                   <a:srgbClr val="00FFFF"/>
                 </a:solidFill>
@@ -20918,7 +20906,7 @@
               <a:t>/</a:t>
             </a:r>
             <a:r>
-              <a:rPr lang="en-US" sz="3000" i="0" u="none" strike="noStrike" cap="none" dirty="0">
+              <a:rPr lang="en-US" sz="3000" b="1" i="0" u="none" strike="noStrike" cap="none" dirty="0">
                 <a:solidFill>
                   <a:schemeClr val="lt1"/>
                 </a:solidFill>
@@ -20930,7 +20918,7 @@
               <a:t> 2</a:t>
             </a:r>
             <a:r>
-              <a:rPr lang="en-US" sz="3000" dirty="0">
+              <a:rPr lang="en-US" sz="3000" b="1" dirty="0">
                 <a:solidFill>
                   <a:srgbClr val="FFFF00"/>
                 </a:solidFill>
@@ -20942,7 +20930,7 @@
               <a:t>)</a:t>
             </a:r>
             <a:r>
-              <a:rPr lang="en-US" sz="3000" dirty="0">
+              <a:rPr lang="en-US" sz="3000" b="1" dirty="0">
                 <a:solidFill>
                   <a:schemeClr val="lt1"/>
                 </a:solidFill>
@@ -20953,7 +20941,7 @@
               </a:rPr>
               <a:t> </a:t>
             </a:r>
-            <a:endParaRPr lang="en-US" sz="3000" i="0" u="none" strike="noStrike" cap="none" dirty="0">
+            <a:endParaRPr lang="en-US" sz="3000" b="1" i="0" u="none" strike="noStrike" cap="none" dirty="0">
               <a:solidFill>
                 <a:schemeClr val="lt1"/>
               </a:solidFill>
@@ -20982,7 +20970,7 @@
               <a:buNone/>
             </a:pPr>
             <a:r>
-              <a:rPr lang="en-US" sz="3000" i="0" u="none" strike="noStrike" cap="none" dirty="0">
+              <a:rPr lang="en-US" sz="3000" b="1" i="0" u="none" strike="noStrike" cap="none" dirty="0">
                 <a:solidFill>
                   <a:srgbClr val="FF40FF"/>
                 </a:solidFill>
@@ -21002,7 +20990,7 @@
               <a:buSzPct val="25000"/>
             </a:pPr>
             <a:r>
-              <a:rPr lang="en-US" sz="3000" i="0" u="none" strike="noStrike" cap="none" dirty="0">
+              <a:rPr lang="en-US" sz="3000" b="1" i="0" u="none" strike="noStrike" cap="none" dirty="0">
                 <a:solidFill>
                   <a:schemeClr val="lt1"/>
                 </a:solidFill>
@@ -21014,7 +21002,7 @@
               <a:t>&gt;&gt;&gt; </a:t>
             </a:r>
             <a:r>
-              <a:rPr lang="en-US" sz="3000" i="0" u="none" strike="noStrike" cap="none" dirty="0">
+              <a:rPr lang="en-US" sz="3000" b="1" i="0" u="none" strike="noStrike" cap="none" dirty="0">
                 <a:solidFill>
                   <a:srgbClr val="FFFF00"/>
                 </a:solidFill>
@@ -21026,7 +21014,7 @@
               <a:t>print(</a:t>
             </a:r>
             <a:r>
-              <a:rPr lang="en-US" sz="3000" i="0" u="none" strike="noStrike" cap="none" dirty="0">
+              <a:rPr lang="en-US" sz="3000" b="1" i="0" u="none" strike="noStrike" cap="none" dirty="0">
                 <a:solidFill>
                   <a:schemeClr val="lt1"/>
                 </a:solidFill>
@@ -21038,7 +21026,7 @@
               <a:t>9 </a:t>
             </a:r>
             <a:r>
-              <a:rPr lang="en-US" sz="3000" i="0" u="none" strike="noStrike" cap="none" dirty="0">
+              <a:rPr lang="en-US" sz="3000" b="1" i="0" u="none" strike="noStrike" cap="none" dirty="0">
                 <a:solidFill>
                   <a:srgbClr val="00FFFF"/>
                 </a:solidFill>
@@ -21050,7 +21038,7 @@
               <a:t>/</a:t>
             </a:r>
             <a:r>
-              <a:rPr lang="en-US" sz="3000" i="0" u="none" strike="noStrike" cap="none" dirty="0">
+              <a:rPr lang="en-US" sz="3000" b="1" i="0" u="none" strike="noStrike" cap="none" dirty="0">
                 <a:solidFill>
                   <a:schemeClr val="lt1"/>
                 </a:solidFill>
@@ -21062,7 +21050,7 @@
               <a:t> 2</a:t>
             </a:r>
             <a:r>
-              <a:rPr lang="en-US" sz="3000" dirty="0">
+              <a:rPr lang="en-US" sz="3000" b="1" dirty="0">
                 <a:solidFill>
                   <a:srgbClr val="FFFF00"/>
                 </a:solidFill>
@@ -21074,7 +21062,7 @@
               <a:t>)</a:t>
             </a:r>
             <a:r>
-              <a:rPr lang="en-US" sz="3000" dirty="0">
+              <a:rPr lang="en-US" sz="3000" b="1" dirty="0">
                 <a:solidFill>
                   <a:schemeClr val="lt1"/>
                 </a:solidFill>
@@ -21085,7 +21073,7 @@
               </a:rPr>
               <a:t> </a:t>
             </a:r>
-            <a:endParaRPr lang="en-US" sz="3000" i="0" u="none" strike="noStrike" cap="none" dirty="0">
+            <a:endParaRPr lang="en-US" sz="3000" b="1" i="0" u="none" strike="noStrike" cap="none" dirty="0">
               <a:solidFill>
                 <a:schemeClr val="lt1"/>
               </a:solidFill>
@@ -21114,7 +21102,7 @@
               <a:buNone/>
             </a:pPr>
             <a:r>
-              <a:rPr lang="en-US" sz="3000" i="0" u="none" strike="noStrike" cap="none" dirty="0">
+              <a:rPr lang="en-US" sz="3000" b="1" i="0" u="none" strike="noStrike" cap="none" dirty="0">
                 <a:solidFill>
                   <a:srgbClr val="FF40FF"/>
                 </a:solidFill>
@@ -21134,7 +21122,7 @@
               <a:buSzPct val="25000"/>
             </a:pPr>
             <a:r>
-              <a:rPr lang="en-US" sz="3000" i="0" u="none" strike="noStrike" cap="none" dirty="0">
+              <a:rPr lang="en-US" sz="3000" b="1" i="0" u="none" strike="noStrike" cap="none" dirty="0">
                 <a:solidFill>
                   <a:schemeClr val="lt1"/>
                 </a:solidFill>
@@ -21146,7 +21134,7 @@
               <a:t>&gt;&gt;&gt; </a:t>
             </a:r>
             <a:r>
-              <a:rPr lang="en-US" sz="3000" i="0" u="none" strike="noStrike" cap="none" dirty="0">
+              <a:rPr lang="en-US" sz="3000" b="1" i="0" u="none" strike="noStrike" cap="none" dirty="0">
                 <a:solidFill>
                   <a:srgbClr val="FFFF00"/>
                 </a:solidFill>
@@ -21158,7 +21146,7 @@
               <a:t>print(</a:t>
             </a:r>
             <a:r>
-              <a:rPr lang="en-US" sz="3000" i="0" u="none" strike="noStrike" cap="none" dirty="0">
+              <a:rPr lang="en-US" sz="3000" b="1" i="0" u="none" strike="noStrike" cap="none" dirty="0">
                 <a:solidFill>
                   <a:schemeClr val="lt1"/>
                 </a:solidFill>
@@ -21170,7 +21158,7 @@
               <a:t>99 </a:t>
             </a:r>
             <a:r>
-              <a:rPr lang="en-US" sz="3000" i="0" u="none" strike="noStrike" cap="none" dirty="0">
+              <a:rPr lang="en-US" sz="3000" b="1" i="0" u="none" strike="noStrike" cap="none" dirty="0">
                 <a:solidFill>
                   <a:srgbClr val="00FFFF"/>
                 </a:solidFill>
@@ -21182,7 +21170,7 @@
               <a:t>/ </a:t>
             </a:r>
             <a:r>
-              <a:rPr lang="en-US" sz="3000" i="0" u="none" strike="noStrike" cap="none" dirty="0">
+              <a:rPr lang="en-US" sz="3000" b="1" i="0" u="none" strike="noStrike" cap="none" dirty="0">
                 <a:solidFill>
                   <a:schemeClr val="lt1"/>
                 </a:solidFill>
@@ -21194,7 +21182,7 @@
               <a:t>100</a:t>
             </a:r>
             <a:r>
-              <a:rPr lang="en-US" sz="3000" dirty="0">
+              <a:rPr lang="en-US" sz="3000" b="1" dirty="0">
                 <a:solidFill>
                   <a:srgbClr val="FFFF00"/>
                 </a:solidFill>
@@ -21206,7 +21194,7 @@
               <a:t>)</a:t>
             </a:r>
             <a:r>
-              <a:rPr lang="en-US" sz="3000" dirty="0">
+              <a:rPr lang="en-US" sz="3000" b="1" dirty="0">
                 <a:solidFill>
                   <a:schemeClr val="lt1"/>
                 </a:solidFill>
@@ -21217,7 +21205,7 @@
               </a:rPr>
               <a:t> </a:t>
             </a:r>
-            <a:endParaRPr lang="en-US" sz="3000" i="0" u="none" strike="noStrike" cap="none" dirty="0">
+            <a:endParaRPr lang="en-US" sz="3000" b="1" i="0" u="none" strike="noStrike" cap="none" dirty="0">
               <a:solidFill>
                 <a:schemeClr val="lt1"/>
               </a:solidFill>
@@ -21246,7 +21234,7 @@
               <a:buNone/>
             </a:pPr>
             <a:r>
-              <a:rPr lang="en-US" sz="3000" i="0" u="none" strike="noStrike" cap="none" dirty="0">
+              <a:rPr lang="en-US" sz="3000" b="1" i="0" u="none" strike="noStrike" cap="none" dirty="0">
                 <a:solidFill>
                   <a:srgbClr val="FF40FF"/>
                 </a:solidFill>
@@ -21266,7 +21254,7 @@
               <a:buSzPct val="25000"/>
             </a:pPr>
             <a:r>
-              <a:rPr lang="en-US" sz="3000" i="0" u="none" strike="noStrike" cap="none" dirty="0">
+              <a:rPr lang="en-US" sz="3000" b="1" i="0" u="none" strike="noStrike" cap="none" dirty="0">
                 <a:solidFill>
                   <a:schemeClr val="lt1"/>
                 </a:solidFill>
@@ -21278,7 +21266,7 @@
               <a:t>&gt;&gt;&gt; </a:t>
             </a:r>
             <a:r>
-              <a:rPr lang="en-US" sz="3000" i="0" u="none" strike="noStrike" cap="none" dirty="0">
+              <a:rPr lang="en-US" sz="3000" b="1" i="0" u="none" strike="noStrike" cap="none" dirty="0">
                 <a:solidFill>
                   <a:srgbClr val="FFFF00"/>
                 </a:solidFill>
@@ -21290,7 +21278,7 @@
               <a:t>print(</a:t>
             </a:r>
             <a:r>
-              <a:rPr lang="en-US" sz="3000" i="0" u="none" strike="noStrike" cap="none" dirty="0">
+              <a:rPr lang="en-US" sz="3000" b="1" i="0" u="none" strike="noStrike" cap="none" dirty="0">
                 <a:solidFill>
                   <a:schemeClr val="lt1"/>
                 </a:solidFill>
@@ -21302,7 +21290,7 @@
               <a:t>10.0 </a:t>
             </a:r>
             <a:r>
-              <a:rPr lang="en-US" sz="3000" i="0" u="none" strike="noStrike" cap="none" dirty="0">
+              <a:rPr lang="en-US" sz="3000" b="1" i="0" u="none" strike="noStrike" cap="none" dirty="0">
                 <a:solidFill>
                   <a:srgbClr val="00FFFF"/>
                 </a:solidFill>
@@ -21314,7 +21302,7 @@
               <a:t>/</a:t>
             </a:r>
             <a:r>
-              <a:rPr lang="en-US" sz="3000" i="0" u="none" strike="noStrike" cap="none" dirty="0">
+              <a:rPr lang="en-US" sz="3000" b="1" i="0" u="none" strike="noStrike" cap="none" dirty="0">
                 <a:solidFill>
                   <a:schemeClr val="lt1"/>
                 </a:solidFill>
@@ -21326,7 +21314,7 @@
               <a:t> 2.0</a:t>
             </a:r>
             <a:r>
-              <a:rPr lang="en-US" sz="3000" dirty="0">
+              <a:rPr lang="en-US" sz="3000" b="1" dirty="0">
                 <a:solidFill>
                   <a:srgbClr val="FFFF00"/>
                 </a:solidFill>
@@ -21338,7 +21326,7 @@
               <a:t>)</a:t>
             </a:r>
             <a:r>
-              <a:rPr lang="en-US" sz="3000" dirty="0">
+              <a:rPr lang="en-US" sz="3000" b="1" dirty="0">
                 <a:solidFill>
                   <a:schemeClr val="lt1"/>
                 </a:solidFill>
@@ -21349,7 +21337,7 @@
               </a:rPr>
               <a:t> </a:t>
             </a:r>
-            <a:endParaRPr lang="en-US" sz="3000" i="0" u="none" strike="noStrike" cap="none" dirty="0">
+            <a:endParaRPr lang="en-US" sz="3000" b="1" i="0" u="none" strike="noStrike" cap="none" dirty="0">
               <a:solidFill>
                 <a:schemeClr val="lt1"/>
               </a:solidFill>
@@ -21378,7 +21366,7 @@
               <a:buNone/>
             </a:pPr>
             <a:r>
-              <a:rPr lang="en-US" sz="3000" i="0" u="none" strike="noStrike" cap="none" dirty="0">
+              <a:rPr lang="en-US" sz="3000" b="1" i="0" u="none" strike="noStrike" cap="none" dirty="0">
                 <a:solidFill>
                   <a:schemeClr val="lt1"/>
                 </a:solidFill>
@@ -21398,7 +21386,7 @@
               <a:buSzPct val="25000"/>
             </a:pPr>
             <a:r>
-              <a:rPr lang="en-US" sz="3000" i="0" u="none" strike="noStrike" cap="none" dirty="0">
+              <a:rPr lang="en-US" sz="3000" b="1" i="0" u="none" strike="noStrike" cap="none" dirty="0">
                 <a:solidFill>
                   <a:schemeClr val="lt1"/>
                 </a:solidFill>
@@ -21410,7 +21398,7 @@
               <a:t>&gt;&gt;&gt; </a:t>
             </a:r>
             <a:r>
-              <a:rPr lang="en-US" sz="3000" i="0" u="none" strike="noStrike" cap="none" dirty="0">
+              <a:rPr lang="en-US" sz="3000" b="1" i="0" u="none" strike="noStrike" cap="none" dirty="0">
                 <a:solidFill>
                   <a:srgbClr val="FFFF00"/>
                 </a:solidFill>
@@ -21422,7 +21410,7 @@
               <a:t>print(</a:t>
             </a:r>
             <a:r>
-              <a:rPr lang="en-US" sz="3000" i="0" u="none" strike="noStrike" cap="none" dirty="0">
+              <a:rPr lang="en-US" sz="3000" b="1" i="0" u="none" strike="noStrike" cap="none" dirty="0">
                 <a:solidFill>
                   <a:schemeClr val="lt1"/>
                 </a:solidFill>
@@ -21434,7 +21422,7 @@
               <a:t>99.0 </a:t>
             </a:r>
             <a:r>
-              <a:rPr lang="en-US" sz="3000" i="0" u="none" strike="noStrike" cap="none" dirty="0">
+              <a:rPr lang="en-US" sz="3000" b="1" i="0" u="none" strike="noStrike" cap="none" dirty="0">
                 <a:solidFill>
                   <a:srgbClr val="00FFFF"/>
                 </a:solidFill>
@@ -21446,7 +21434,7 @@
               <a:t>/</a:t>
             </a:r>
             <a:r>
-              <a:rPr lang="en-US" sz="3000" i="0" u="none" strike="noStrike" cap="none" dirty="0">
+              <a:rPr lang="en-US" sz="3000" b="1" i="0" u="none" strike="noStrike" cap="none" dirty="0">
                 <a:solidFill>
                   <a:schemeClr val="lt1"/>
                 </a:solidFill>
@@ -21458,7 +21446,7 @@
               <a:t> 100.0</a:t>
             </a:r>
             <a:r>
-              <a:rPr lang="en-US" sz="3000" dirty="0">
+              <a:rPr lang="en-US" sz="3000" b="1" dirty="0">
                 <a:solidFill>
                   <a:srgbClr val="FFFF00"/>
                 </a:solidFill>
@@ -21470,7 +21458,7 @@
               <a:t>)</a:t>
             </a:r>
             <a:r>
-              <a:rPr lang="en-US" sz="3000" dirty="0">
+              <a:rPr lang="en-US" sz="3000" b="1" dirty="0">
                 <a:solidFill>
                   <a:schemeClr val="lt1"/>
                 </a:solidFill>
@@ -21481,7 +21469,7 @@
               </a:rPr>
               <a:t> </a:t>
             </a:r>
-            <a:endParaRPr lang="en-US" sz="3000" i="0" u="none" strike="noStrike" cap="none" dirty="0">
+            <a:endParaRPr lang="en-US" sz="3000" b="1" i="0" u="none" strike="noStrike" cap="none" dirty="0">
               <a:solidFill>
                 <a:schemeClr val="lt1"/>
               </a:solidFill>
@@ -21510,7 +21498,7 @@
               <a:buNone/>
             </a:pPr>
             <a:r>
-              <a:rPr lang="en-US" sz="3000" i="0" u="none" strike="noStrike" cap="none" dirty="0">
+              <a:rPr lang="en-US" sz="3000" b="1" i="0" u="none" strike="noStrike" cap="none" dirty="0">
                 <a:solidFill>
                   <a:schemeClr val="lt1"/>
                 </a:solidFill>
@@ -21891,7 +21879,7 @@
               <a:buNone/>
             </a:pPr>
             <a:r>
-              <a:rPr lang="en-US" sz="2400" i="0" u="none" strike="noStrike" cap="none" dirty="0">
+              <a:rPr lang="en-US" sz="2400" b="1" i="0" u="none" strike="noStrike" cap="none" dirty="0">
                 <a:solidFill>
                   <a:schemeClr val="lt1"/>
                 </a:solidFill>
@@ -21903,7 +21891,7 @@
               <a:t>&gt;</a:t>
             </a:r>
             <a:r>
-              <a:rPr lang="en-US" sz="2600" i="0" u="none" strike="noStrike" cap="none" dirty="0">
+              <a:rPr lang="en-US" sz="2600" b="1" i="0" u="none" strike="noStrike" cap="none" dirty="0">
                 <a:solidFill>
                   <a:schemeClr val="lt1"/>
                 </a:solidFill>
@@ -21915,7 +21903,7 @@
               <a:t>&gt;&gt; </a:t>
             </a:r>
             <a:r>
-              <a:rPr lang="en-US" sz="2600" i="0" u="none" strike="noStrike" cap="none" dirty="0" err="1">
+              <a:rPr lang="en-US" sz="2600" b="1" i="0" u="none" strike="noStrike" cap="none" dirty="0" err="1">
                 <a:solidFill>
                   <a:srgbClr val="00FF00"/>
                 </a:solidFill>
@@ -21927,7 +21915,7 @@
               <a:t>sval</a:t>
             </a:r>
             <a:r>
-              <a:rPr lang="en-US" sz="2600" i="0" u="none" strike="noStrike" cap="none" dirty="0">
+              <a:rPr lang="en-US" sz="2600" b="1" i="0" u="none" strike="noStrike" cap="none" dirty="0">
                 <a:solidFill>
                   <a:schemeClr val="lt1"/>
                 </a:solidFill>
@@ -21958,7 +21946,7 @@
               <a:buNone/>
             </a:pPr>
             <a:r>
-              <a:rPr lang="en-US" sz="2600" i="0" u="none" strike="noStrike" cap="none" dirty="0">
+              <a:rPr lang="en-US" sz="2600" b="1" i="0" u="none" strike="noStrike" cap="none" dirty="0">
                 <a:solidFill>
                   <a:schemeClr val="lt1"/>
                 </a:solidFill>
@@ -21970,7 +21958,7 @@
               <a:t>&gt;&gt;&gt; </a:t>
             </a:r>
             <a:r>
-              <a:rPr lang="en-US" sz="2600" i="0" u="none" strike="noStrike" cap="none" dirty="0">
+              <a:rPr lang="en-US" sz="2600" b="1" i="0" u="none" strike="noStrike" cap="none" dirty="0">
                 <a:solidFill>
                   <a:srgbClr val="FFFF00"/>
                 </a:solidFill>
@@ -21982,7 +21970,7 @@
               <a:t>type</a:t>
             </a:r>
             <a:r>
-              <a:rPr lang="en-US" sz="2600" i="0" u="none" strike="noStrike" cap="none" dirty="0">
+              <a:rPr lang="en-US" sz="2600" b="1" i="0" u="none" strike="noStrike" cap="none" dirty="0">
                 <a:solidFill>
                   <a:schemeClr val="lt1"/>
                 </a:solidFill>
@@ -21994,7 +21982,7 @@
               <a:t>(</a:t>
             </a:r>
             <a:r>
-              <a:rPr lang="en-US" sz="2600" i="0" u="none" strike="noStrike" cap="none" dirty="0" err="1">
+              <a:rPr lang="en-US" sz="2600" b="1" i="0" u="none" strike="noStrike" cap="none" dirty="0" err="1">
                 <a:solidFill>
                   <a:srgbClr val="00FF00"/>
                 </a:solidFill>
@@ -22006,7 +21994,7 @@
               <a:t>sval</a:t>
             </a:r>
             <a:r>
-              <a:rPr lang="en-US" sz="2600" i="0" u="none" strike="noStrike" cap="none" dirty="0">
+              <a:rPr lang="en-US" sz="2600" b="1" i="0" u="none" strike="noStrike" cap="none" dirty="0">
                 <a:solidFill>
                   <a:schemeClr val="lt1"/>
                 </a:solidFill>
@@ -22037,7 +22025,7 @@
               <a:buNone/>
             </a:pPr>
             <a:r>
-              <a:rPr lang="en-US" sz="2600" i="0" u="none" strike="noStrike" cap="none" dirty="0">
+              <a:rPr lang="en-US" sz="2600" b="1" i="0" u="none" strike="noStrike" cap="none" dirty="0">
                 <a:solidFill>
                   <a:schemeClr val="lt1"/>
                 </a:solidFill>
@@ -22049,7 +22037,7 @@
               <a:t>&lt;class '</a:t>
             </a:r>
             <a:r>
-              <a:rPr lang="en-US" sz="2600" i="0" u="none" strike="noStrike" cap="none" dirty="0" err="1">
+              <a:rPr lang="en-US" sz="2600" b="1" i="0" u="none" strike="noStrike" cap="none" dirty="0" err="1">
                 <a:solidFill>
                   <a:schemeClr val="lt1"/>
                 </a:solidFill>
@@ -22061,7 +22049,7 @@
               <a:t>str</a:t>
             </a:r>
             <a:r>
-              <a:rPr lang="en-US" sz="2600" i="0" u="none" strike="noStrike" cap="none" dirty="0">
+              <a:rPr lang="en-US" sz="2600" b="1" i="0" u="none" strike="noStrike" cap="none" dirty="0">
                 <a:solidFill>
                   <a:schemeClr val="lt1"/>
                 </a:solidFill>
@@ -22092,7 +22080,7 @@
               <a:buNone/>
             </a:pPr>
             <a:r>
-              <a:rPr lang="en-US" sz="2600" i="0" u="none" strike="noStrike" cap="none" dirty="0">
+              <a:rPr lang="en-US" sz="2600" b="1" i="0" u="none" strike="noStrike" cap="none" dirty="0">
                 <a:solidFill>
                   <a:schemeClr val="lt1"/>
                 </a:solidFill>
@@ -22104,7 +22092,7 @@
               <a:t>&gt;&gt;&gt; </a:t>
             </a:r>
             <a:r>
-              <a:rPr lang="en-US" sz="2600" i="0" u="none" strike="noStrike" cap="none" dirty="0">
+              <a:rPr lang="en-US" sz="2600" b="1" i="0" u="none" strike="noStrike" cap="none" dirty="0">
                 <a:solidFill>
                   <a:srgbClr val="FFFF00"/>
                 </a:solidFill>
@@ -22116,7 +22104,7 @@
               <a:t>print</a:t>
             </a:r>
             <a:r>
-              <a:rPr lang="en-US" sz="2600" dirty="0">
+              <a:rPr lang="en-US" sz="2600" b="1" dirty="0">
                 <a:solidFill>
                   <a:schemeClr val="lt1"/>
                 </a:solidFill>
@@ -22128,7 +22116,7 @@
               <a:t>(</a:t>
             </a:r>
             <a:r>
-              <a:rPr lang="en-US" sz="2600" i="0" u="none" strike="noStrike" cap="none" dirty="0" err="1">
+              <a:rPr lang="en-US" sz="2600" b="1" i="0" u="none" strike="noStrike" cap="none" dirty="0" err="1">
                 <a:solidFill>
                   <a:srgbClr val="00FF00"/>
                 </a:solidFill>
@@ -22140,7 +22128,7 @@
               <a:t>sval</a:t>
             </a:r>
             <a:r>
-              <a:rPr lang="en-US" sz="2600" i="0" u="none" strike="noStrike" cap="none" dirty="0">
+              <a:rPr lang="en-US" sz="2600" b="1" i="0" u="none" strike="noStrike" cap="none" dirty="0">
                 <a:solidFill>
                   <a:schemeClr val="lt1"/>
                 </a:solidFill>
@@ -22152,7 +22140,7 @@
               <a:t> </a:t>
             </a:r>
             <a:r>
-              <a:rPr lang="en-US" sz="2600" i="0" u="none" strike="noStrike" cap="none" dirty="0">
+              <a:rPr lang="en-US" sz="2600" b="1" i="0" u="none" strike="noStrike" cap="none" dirty="0">
                 <a:solidFill>
                   <a:srgbClr val="00FFFF"/>
                 </a:solidFill>
@@ -22164,7 +22152,7 @@
               <a:t>+</a:t>
             </a:r>
             <a:r>
-              <a:rPr lang="en-US" sz="2600" i="0" u="none" strike="noStrike" cap="none" dirty="0">
+              <a:rPr lang="en-US" sz="2600" b="1" i="0" u="none" strike="noStrike" cap="none" dirty="0">
                 <a:solidFill>
                   <a:schemeClr val="lt1"/>
                 </a:solidFill>
@@ -22184,7 +22172,7 @@
               <a:buSzPct val="25000"/>
             </a:pPr>
             <a:r>
-              <a:rPr lang="en-US" sz="2600" dirty="0">
+              <a:rPr lang="en-US" sz="2600" b="1" dirty="0">
                 <a:solidFill>
                   <a:srgbClr val="E06666"/>
                 </a:solidFill>
@@ -22204,7 +22192,7 @@
               <a:buSzPct val="25000"/>
             </a:pPr>
             <a:r>
-              <a:rPr lang="en-US" sz="2600" dirty="0">
+              <a:rPr lang="en-US" sz="2600" b="1" dirty="0">
                 <a:solidFill>
                   <a:srgbClr val="E06666"/>
                 </a:solidFill>
@@ -22224,7 +22212,7 @@
               <a:buSzPct val="25000"/>
             </a:pPr>
             <a:r>
-              <a:rPr lang="en-US" sz="2600" dirty="0" err="1">
+              <a:rPr lang="en-US" sz="2600" b="1" dirty="0" err="1">
                 <a:solidFill>
                   <a:srgbClr val="E06666"/>
                 </a:solidFill>
@@ -22236,7 +22224,7 @@
               <a:t>TypeError</a:t>
             </a:r>
             <a:r>
-              <a:rPr lang="en-US" sz="2600" dirty="0">
+              <a:rPr lang="en-US" sz="2600" b="1" dirty="0">
                 <a:solidFill>
                   <a:srgbClr val="E06666"/>
                 </a:solidFill>
@@ -22256,7 +22244,7 @@
               <a:buSzPct val="25000"/>
             </a:pPr>
             <a:r>
-              <a:rPr lang="en-US" sz="2600" i="0" u="none" strike="noStrike" cap="none" dirty="0">
+              <a:rPr lang="en-US" sz="2600" b="1" i="0" u="none" strike="noStrike" cap="none" dirty="0">
                 <a:solidFill>
                   <a:schemeClr val="lt1"/>
                 </a:solidFill>
@@ -22268,7 +22256,7 @@
               <a:t>&gt;&gt;&gt; </a:t>
             </a:r>
             <a:r>
-              <a:rPr lang="en-US" sz="2600" i="0" u="none" strike="noStrike" cap="none" dirty="0" err="1">
+              <a:rPr lang="en-US" sz="2600" b="1" i="0" u="none" strike="noStrike" cap="none" dirty="0" err="1">
                 <a:solidFill>
                   <a:srgbClr val="00FF00"/>
                 </a:solidFill>
@@ -22280,7 +22268,7 @@
               <a:t>ival</a:t>
             </a:r>
             <a:r>
-              <a:rPr lang="en-US" sz="2600" i="0" u="none" strike="noStrike" cap="none" dirty="0">
+              <a:rPr lang="en-US" sz="2600" b="1" i="0" u="none" strike="noStrike" cap="none" dirty="0">
                 <a:solidFill>
                   <a:schemeClr val="lt1"/>
                 </a:solidFill>
@@ -22292,7 +22280,7 @@
               <a:t> = </a:t>
             </a:r>
             <a:r>
-              <a:rPr lang="en-US" sz="2600" i="0" u="none" strike="noStrike" cap="none" dirty="0">
+              <a:rPr lang="en-US" sz="2600" b="1" i="0" u="none" strike="noStrike" cap="none" dirty="0">
                 <a:solidFill>
                   <a:srgbClr val="FFFF00"/>
                 </a:solidFill>
@@ -22304,7 +22292,7 @@
               <a:t>int</a:t>
             </a:r>
             <a:r>
-              <a:rPr lang="en-US" sz="2600" i="0" u="none" strike="noStrike" cap="none" dirty="0">
+              <a:rPr lang="en-US" sz="2600" b="1" i="0" u="none" strike="noStrike" cap="none" dirty="0">
                 <a:solidFill>
                   <a:schemeClr val="lt1"/>
                 </a:solidFill>
@@ -22316,7 +22304,7 @@
               <a:t>(</a:t>
             </a:r>
             <a:r>
-              <a:rPr lang="en-US" sz="2600" i="0" u="none" strike="noStrike" cap="none" dirty="0" err="1">
+              <a:rPr lang="en-US" sz="2600" b="1" i="0" u="none" strike="noStrike" cap="none" dirty="0" err="1">
                 <a:solidFill>
                   <a:srgbClr val="00FF00"/>
                 </a:solidFill>
@@ -22328,7 +22316,7 @@
               <a:t>sval</a:t>
             </a:r>
             <a:r>
-              <a:rPr lang="en-US" sz="2600" i="0" u="none" strike="noStrike" cap="none" dirty="0">
+              <a:rPr lang="en-US" sz="2600" b="1" i="0" u="none" strike="noStrike" cap="none" dirty="0">
                 <a:solidFill>
                   <a:schemeClr val="lt1"/>
                 </a:solidFill>
@@ -22359,7 +22347,7 @@
               <a:buNone/>
             </a:pPr>
             <a:r>
-              <a:rPr lang="en-US" sz="2600" i="0" u="none" strike="noStrike" cap="none" dirty="0">
+              <a:rPr lang="en-US" sz="2600" b="1" i="0" u="none" strike="noStrike" cap="none" dirty="0">
                 <a:solidFill>
                   <a:schemeClr val="lt1"/>
                 </a:solidFill>
@@ -22371,7 +22359,7 @@
               <a:t>&gt;&gt;&gt; </a:t>
             </a:r>
             <a:r>
-              <a:rPr lang="en-US" sz="2600" i="0" u="none" strike="noStrike" cap="none" dirty="0">
+              <a:rPr lang="en-US" sz="2600" b="1" i="0" u="none" strike="noStrike" cap="none" dirty="0">
                 <a:solidFill>
                   <a:srgbClr val="FFFF00"/>
                 </a:solidFill>
@@ -22383,7 +22371,7 @@
               <a:t>type</a:t>
             </a:r>
             <a:r>
-              <a:rPr lang="en-US" sz="2600" i="0" u="none" strike="noStrike" cap="none" dirty="0">
+              <a:rPr lang="en-US" sz="2600" b="1" i="0" u="none" strike="noStrike" cap="none" dirty="0">
                 <a:solidFill>
                   <a:schemeClr val="lt1"/>
                 </a:solidFill>
@@ -22395,7 +22383,7 @@
               <a:t>(</a:t>
             </a:r>
             <a:r>
-              <a:rPr lang="en-US" sz="2600" i="0" u="none" strike="noStrike" cap="none" dirty="0" err="1">
+              <a:rPr lang="en-US" sz="2600" b="1" i="0" u="none" strike="noStrike" cap="none" dirty="0" err="1">
                 <a:solidFill>
                   <a:srgbClr val="00FF00"/>
                 </a:solidFill>
@@ -22407,7 +22395,7 @@
               <a:t>ival</a:t>
             </a:r>
             <a:r>
-              <a:rPr lang="en-US" sz="2600" i="0" u="none" strike="noStrike" cap="none" dirty="0">
+              <a:rPr lang="en-US" sz="2600" b="1" i="0" u="none" strike="noStrike" cap="none" dirty="0">
                 <a:solidFill>
                   <a:schemeClr val="lt1"/>
                 </a:solidFill>
@@ -22438,7 +22426,7 @@
               <a:buNone/>
             </a:pPr>
             <a:r>
-              <a:rPr lang="en-US" sz="2600" i="0" u="none" strike="noStrike" cap="none" dirty="0">
+              <a:rPr lang="en-US" sz="2600" b="1" i="0" u="none" strike="noStrike" cap="none" dirty="0">
                 <a:solidFill>
                   <a:schemeClr val="lt1"/>
                 </a:solidFill>
@@ -22450,7 +22438,7 @@
               <a:t>&lt;class '</a:t>
             </a:r>
             <a:r>
-              <a:rPr lang="en-US" sz="2600" i="0" u="none" strike="noStrike" cap="none" dirty="0" err="1">
+              <a:rPr lang="en-US" sz="2600" b="1" i="0" u="none" strike="noStrike" cap="none" dirty="0" err="1">
                 <a:solidFill>
                   <a:schemeClr val="lt1"/>
                 </a:solidFill>
@@ -22462,7 +22450,7 @@
               <a:t>int</a:t>
             </a:r>
             <a:r>
-              <a:rPr lang="en-US" sz="2600" i="0" u="none" strike="noStrike" cap="none" dirty="0">
+              <a:rPr lang="en-US" sz="2600" b="1" i="0" u="none" strike="noStrike" cap="none" dirty="0">
                 <a:solidFill>
                   <a:schemeClr val="lt1"/>
                 </a:solidFill>
@@ -22493,7 +22481,7 @@
               <a:buNone/>
             </a:pPr>
             <a:r>
-              <a:rPr lang="en-US" sz="2600" i="0" u="none" strike="noStrike" cap="none" dirty="0">
+              <a:rPr lang="en-US" sz="2600" b="1" i="0" u="none" strike="noStrike" cap="none" dirty="0">
                 <a:solidFill>
                   <a:schemeClr val="lt1"/>
                 </a:solidFill>
@@ -22505,7 +22493,7 @@
               <a:t>&gt;&gt;&gt; </a:t>
             </a:r>
             <a:r>
-              <a:rPr lang="en-US" sz="2600" i="0" u="none" strike="noStrike" cap="none" dirty="0">
+              <a:rPr lang="en-US" sz="2600" b="1" i="0" u="none" strike="noStrike" cap="none" dirty="0">
                 <a:solidFill>
                   <a:srgbClr val="FFFF00"/>
                 </a:solidFill>
@@ -22517,7 +22505,7 @@
               <a:t>print</a:t>
             </a:r>
             <a:r>
-              <a:rPr lang="en-US" sz="2600" dirty="0">
+              <a:rPr lang="en-US" sz="2600" b="1" dirty="0">
                 <a:solidFill>
                   <a:schemeClr val="lt1"/>
                 </a:solidFill>
@@ -22529,7 +22517,7 @@
               <a:t>(</a:t>
             </a:r>
             <a:r>
-              <a:rPr lang="en-US" sz="2600" i="0" u="none" strike="noStrike" cap="none" dirty="0" err="1">
+              <a:rPr lang="en-US" sz="2600" b="1" i="0" u="none" strike="noStrike" cap="none" dirty="0" err="1">
                 <a:solidFill>
                   <a:srgbClr val="00FF00"/>
                 </a:solidFill>
@@ -22541,7 +22529,7 @@
               <a:t>ival</a:t>
             </a:r>
             <a:r>
-              <a:rPr lang="en-US" sz="2600" i="0" u="none" strike="noStrike" cap="none" dirty="0">
+              <a:rPr lang="en-US" sz="2600" b="1" i="0" u="none" strike="noStrike" cap="none" dirty="0">
                 <a:solidFill>
                   <a:schemeClr val="lt1"/>
                 </a:solidFill>
@@ -22572,7 +22560,7 @@
               <a:buNone/>
             </a:pPr>
             <a:r>
-              <a:rPr lang="en-US" sz="2600" i="0" u="none" strike="noStrike" cap="none" dirty="0">
+              <a:rPr lang="en-US" sz="2600" b="1" i="0" u="none" strike="noStrike" cap="none" dirty="0">
                 <a:solidFill>
                   <a:schemeClr val="lt1"/>
                 </a:solidFill>
@@ -22603,7 +22591,7 @@
               <a:buNone/>
             </a:pPr>
             <a:r>
-              <a:rPr lang="en-US" sz="2600" i="0" u="none" strike="noStrike" cap="none" dirty="0">
+              <a:rPr lang="en-US" sz="2600" b="1" i="0" u="none" strike="noStrike" cap="none" dirty="0">
                 <a:solidFill>
                   <a:schemeClr val="lt1"/>
                 </a:solidFill>
@@ -22615,7 +22603,7 @@
               <a:t>&gt;&gt;&gt; </a:t>
             </a:r>
             <a:r>
-              <a:rPr lang="en-US" sz="2600" i="0" u="none" strike="noStrike" cap="none" dirty="0" err="1">
+              <a:rPr lang="en-US" sz="2600" b="1" i="0" u="none" strike="noStrike" cap="none" dirty="0" err="1">
                 <a:solidFill>
                   <a:srgbClr val="00FF00"/>
                 </a:solidFill>
@@ -22627,7 +22615,7 @@
               <a:t>nsv</a:t>
             </a:r>
             <a:r>
-              <a:rPr lang="en-US" sz="2600" i="0" u="none" strike="noStrike" cap="none" dirty="0">
+              <a:rPr lang="en-US" sz="2600" b="1" i="0" u="none" strike="noStrike" cap="none" dirty="0">
                 <a:solidFill>
                   <a:schemeClr val="lt1"/>
                 </a:solidFill>
@@ -22658,7 +22646,7 @@
               <a:buNone/>
             </a:pPr>
             <a:r>
-              <a:rPr lang="en-US" sz="2600" i="0" u="none" strike="noStrike" cap="none" dirty="0">
+              <a:rPr lang="en-US" sz="2600" b="1" i="0" u="none" strike="noStrike" cap="none" dirty="0">
                 <a:solidFill>
                   <a:schemeClr val="lt1"/>
                 </a:solidFill>
@@ -22670,7 +22658,7 @@
               <a:t>&gt;&gt;&gt; </a:t>
             </a:r>
             <a:r>
-              <a:rPr lang="en-US" sz="2600" i="0" u="none" strike="noStrike" cap="none" dirty="0" err="1">
+              <a:rPr lang="en-US" sz="2600" b="1" i="0" u="none" strike="noStrike" cap="none" dirty="0" err="1">
                 <a:solidFill>
                   <a:srgbClr val="00FF00"/>
                 </a:solidFill>
@@ -22682,7 +22670,7 @@
               <a:t>niv</a:t>
             </a:r>
             <a:r>
-              <a:rPr lang="en-US" sz="2600" i="0" u="none" strike="noStrike" cap="none" dirty="0">
+              <a:rPr lang="en-US" sz="2600" b="1" i="0" u="none" strike="noStrike" cap="none" dirty="0">
                 <a:solidFill>
                   <a:schemeClr val="lt1"/>
                 </a:solidFill>
@@ -22694,7 +22682,7 @@
               <a:t> = </a:t>
             </a:r>
             <a:r>
-              <a:rPr lang="en-US" sz="2600" i="0" u="none" strike="noStrike" cap="none" dirty="0">
+              <a:rPr lang="en-US" sz="2600" b="1" i="0" u="none" strike="noStrike" cap="none" dirty="0">
                 <a:solidFill>
                   <a:srgbClr val="FFFF00"/>
                 </a:solidFill>
@@ -22706,7 +22694,7 @@
               <a:t>int</a:t>
             </a:r>
             <a:r>
-              <a:rPr lang="en-US" sz="2600" i="0" u="none" strike="noStrike" cap="none" dirty="0">
+              <a:rPr lang="en-US" sz="2600" b="1" i="0" u="none" strike="noStrike" cap="none" dirty="0">
                 <a:solidFill>
                   <a:schemeClr val="lt1"/>
                 </a:solidFill>
@@ -22718,7 +22706,7 @@
               <a:t>(</a:t>
             </a:r>
             <a:r>
-              <a:rPr lang="en-US" sz="2600" i="0" u="none" strike="noStrike" cap="none" dirty="0" err="1">
+              <a:rPr lang="en-US" sz="2600" b="1" i="0" u="none" strike="noStrike" cap="none" dirty="0" err="1">
                 <a:solidFill>
                   <a:srgbClr val="00FF00"/>
                 </a:solidFill>
@@ -22730,7 +22718,7 @@
               <a:t>nsv</a:t>
             </a:r>
             <a:r>
-              <a:rPr lang="en-US" sz="2600" i="0" u="none" strike="noStrike" cap="none" dirty="0">
+              <a:rPr lang="en-US" sz="2600" b="1" i="0" u="none" strike="noStrike" cap="none" dirty="0">
                 <a:solidFill>
                   <a:schemeClr val="lt1"/>
                 </a:solidFill>
@@ -22750,7 +22738,7 @@
               <a:buSzPct val="25000"/>
             </a:pPr>
             <a:r>
-              <a:rPr lang="en-US" sz="2600" dirty="0">
+              <a:rPr lang="en-US" sz="2600" b="1" dirty="0">
                 <a:solidFill>
                   <a:srgbClr val="E06666"/>
                 </a:solidFill>
@@ -22770,7 +22758,7 @@
               <a:buSzPct val="25000"/>
             </a:pPr>
             <a:r>
-              <a:rPr lang="en-US" sz="2600" dirty="0" err="1">
+              <a:rPr lang="en-US" sz="2600" b="1" dirty="0" err="1">
                 <a:solidFill>
                   <a:srgbClr val="E06666"/>
                 </a:solidFill>
@@ -22782,7 +22770,7 @@
               <a:t>ValueError</a:t>
             </a:r>
             <a:r>
-              <a:rPr lang="en-US" sz="2600" dirty="0">
+              <a:rPr lang="en-US" sz="2600" b="1" dirty="0">
                 <a:solidFill>
                   <a:srgbClr val="E06666"/>
                 </a:solidFill>
@@ -22793,7 +22781,7 @@
               </a:rPr>
               <a:t>: invalid literal for int() with base 10: 'x'</a:t>
             </a:r>
-            <a:endParaRPr lang="en-US" sz="2600" i="0" u="none" strike="noStrike" cap="none" dirty="0">
+            <a:endParaRPr lang="en-US" sz="2600" b="1" i="0" u="none" strike="noStrike" cap="none" dirty="0">
               <a:solidFill>
                 <a:srgbClr val="E06666"/>
               </a:solidFill>
@@ -23098,7 +23086,7 @@
               <a:buNone/>
             </a:pPr>
             <a:r>
-              <a:rPr lang="en-US" sz="3000" i="0" u="none" strike="noStrike" cap="none" dirty="0" err="1">
+              <a:rPr lang="en-US" sz="3000" b="1" i="0" u="none" strike="noStrike" cap="none" dirty="0" err="1">
                 <a:solidFill>
                   <a:srgbClr val="00FF00"/>
                 </a:solidFill>
@@ -23110,7 +23098,7 @@
               <a:t>nam</a:t>
             </a:r>
             <a:r>
-              <a:rPr lang="en-US" sz="3000" i="0" u="none" strike="noStrike" cap="none" dirty="0">
+              <a:rPr lang="en-US" sz="3000" b="1" i="0" u="none" strike="noStrike" cap="none" dirty="0">
                 <a:solidFill>
                   <a:schemeClr val="lt1"/>
                 </a:solidFill>
@@ -23122,7 +23110,7 @@
               <a:t> = </a:t>
             </a:r>
             <a:r>
-              <a:rPr lang="en-US" sz="3000" i="0" u="none" strike="noStrike" cap="none" dirty="0">
+              <a:rPr lang="en-US" sz="3000" b="1" i="0" u="none" strike="noStrike" cap="none" dirty="0">
                 <a:solidFill>
                   <a:srgbClr val="FFFF00"/>
                 </a:solidFill>
@@ -23134,7 +23122,7 @@
               <a:t>input</a:t>
             </a:r>
             <a:r>
-              <a:rPr lang="en-US" sz="3000" i="0" u="none" strike="noStrike" cap="none" dirty="0">
+              <a:rPr lang="en-US" sz="3000" b="1" i="0" u="none" strike="noStrike" cap="none" dirty="0">
                 <a:solidFill>
                   <a:schemeClr val="lt1"/>
                 </a:solidFill>
@@ -23146,7 +23134,7 @@
               <a:t>(</a:t>
             </a:r>
             <a:r>
-              <a:rPr lang="en-US" sz="3000" dirty="0">
+              <a:rPr lang="en-US" sz="3000" b="1" dirty="0">
                 <a:solidFill>
                   <a:schemeClr val="lt1"/>
                 </a:solidFill>
@@ -23158,7 +23146,7 @@
               <a:t>'</a:t>
             </a:r>
             <a:r>
-              <a:rPr lang="en-US" sz="3000" i="0" u="none" strike="noStrike" cap="none" dirty="0">
+              <a:rPr lang="en-US" sz="3000" b="1" i="0" u="none" strike="noStrike" cap="none" dirty="0">
                 <a:solidFill>
                   <a:schemeClr val="lt1"/>
                 </a:solidFill>
@@ -23170,7 +23158,7 @@
               <a:t>Who are you? </a:t>
             </a:r>
             <a:r>
-              <a:rPr lang="en-US" sz="3000" dirty="0">
+              <a:rPr lang="en-US" sz="3000" b="1" dirty="0">
                 <a:solidFill>
                   <a:schemeClr val="lt1"/>
                 </a:solidFill>
@@ -23182,7 +23170,7 @@
               <a:t>'</a:t>
             </a:r>
             <a:r>
-              <a:rPr lang="en-US" sz="3000" i="0" u="none" strike="noStrike" cap="none" dirty="0">
+              <a:rPr lang="en-US" sz="3000" b="1" i="0" u="none" strike="noStrike" cap="none" dirty="0">
                 <a:solidFill>
                   <a:schemeClr val="lt1"/>
                 </a:solidFill>
@@ -23202,7 +23190,7 @@
               <a:buSzPct val="25000"/>
             </a:pPr>
             <a:r>
-              <a:rPr lang="en-US" sz="3000" dirty="0">
+              <a:rPr lang="en-US" sz="3000" b="1" dirty="0">
                 <a:solidFill>
                   <a:srgbClr val="FFFF00"/>
                 </a:solidFill>
@@ -23214,7 +23202,7 @@
               <a:t>p</a:t>
             </a:r>
             <a:r>
-              <a:rPr lang="en-US" sz="3000" i="0" u="none" strike="noStrike" cap="none" dirty="0">
+              <a:rPr lang="en-US" sz="3000" b="1" i="0" u="none" strike="noStrike" cap="none" dirty="0">
                 <a:solidFill>
                   <a:srgbClr val="FFFF00"/>
                 </a:solidFill>
@@ -23226,7 +23214,7 @@
               <a:t>rint(</a:t>
             </a:r>
             <a:r>
-              <a:rPr lang="en-US" sz="3000" i="0" u="none" strike="noStrike" cap="none" dirty="0">
+              <a:rPr lang="en-US" sz="3000" b="1" i="0" u="none" strike="noStrike" cap="none" dirty="0">
                 <a:solidFill>
                   <a:schemeClr val="lt1"/>
                 </a:solidFill>
@@ -23238,7 +23226,7 @@
               <a:t>'Welcome', </a:t>
             </a:r>
             <a:r>
-              <a:rPr lang="en-US" sz="3000" i="0" u="none" strike="noStrike" cap="none" dirty="0" err="1">
+              <a:rPr lang="en-US" sz="3000" b="1" i="0" u="none" strike="noStrike" cap="none" dirty="0" err="1">
                 <a:solidFill>
                   <a:srgbClr val="00FF00"/>
                 </a:solidFill>
@@ -23250,7 +23238,7 @@
               <a:t>nam</a:t>
             </a:r>
             <a:r>
-              <a:rPr lang="en-US" sz="3000" dirty="0">
+              <a:rPr lang="en-US" sz="3000" b="1" dirty="0">
                 <a:solidFill>
                   <a:srgbClr val="FFFF00"/>
                 </a:solidFill>
@@ -23261,7 +23249,7 @@
               </a:rPr>
               <a:t>)</a:t>
             </a:r>
-            <a:endParaRPr lang="en-US" sz="3000" i="0" u="none" strike="noStrike" cap="none" dirty="0">
+            <a:endParaRPr lang="en-US" sz="3000" b="1" i="0" u="none" strike="noStrike" cap="none" dirty="0">
               <a:solidFill>
                 <a:srgbClr val="00FF00"/>
               </a:solidFill>
@@ -23594,7 +23582,7 @@
               <a:buNone/>
             </a:pPr>
             <a:r>
-              <a:rPr lang="en-US" sz="2800" i="0" u="none" strike="noStrike" cap="none" dirty="0" err="1">
+              <a:rPr lang="en-US" sz="2800" b="1" i="0" u="none" strike="noStrike" cap="none" dirty="0" err="1">
                 <a:solidFill>
                   <a:srgbClr val="00FF00"/>
                 </a:solidFill>
@@ -23606,7 +23594,7 @@
               <a:t>inp</a:t>
             </a:r>
             <a:r>
-              <a:rPr lang="en-US" sz="2800" i="0" u="none" strike="noStrike" cap="none" dirty="0">
+              <a:rPr lang="en-US" sz="2800" b="1" i="0" u="none" strike="noStrike" cap="none" dirty="0">
                 <a:solidFill>
                   <a:schemeClr val="lt1"/>
                 </a:solidFill>
@@ -23618,7 +23606,7 @@
               <a:t> = </a:t>
             </a:r>
             <a:r>
-              <a:rPr lang="en-US" sz="2800" i="0" u="none" strike="noStrike" cap="none" dirty="0">
+              <a:rPr lang="en-US" sz="2800" b="1" i="0" u="none" strike="noStrike" cap="none" dirty="0">
                 <a:solidFill>
                   <a:srgbClr val="FFFF00"/>
                 </a:solidFill>
@@ -23630,7 +23618,7 @@
               <a:t>input(</a:t>
             </a:r>
             <a:r>
-              <a:rPr lang="en-US" sz="2800" dirty="0">
+              <a:rPr lang="en-US" sz="2800" b="1" dirty="0">
                 <a:solidFill>
                   <a:schemeClr val="lt1"/>
                 </a:solidFill>
@@ -23642,7 +23630,7 @@
               <a:t>'</a:t>
             </a:r>
             <a:r>
-              <a:rPr lang="en-US" sz="2800" i="0" u="none" strike="noStrike" cap="none" dirty="0">
+              <a:rPr lang="en-US" sz="2800" b="1" i="0" u="none" strike="noStrike" cap="none" dirty="0">
                 <a:solidFill>
                   <a:schemeClr val="lt1"/>
                 </a:solidFill>
@@ -23654,7 +23642,7 @@
               <a:t>Europe floor?</a:t>
             </a:r>
             <a:r>
-              <a:rPr lang="en-US" sz="2800" dirty="0">
+              <a:rPr lang="en-US" sz="2800" b="1" dirty="0">
                 <a:solidFill>
                   <a:schemeClr val="lt1"/>
                 </a:solidFill>
@@ -23666,7 +23654,7 @@
               <a:t>'</a:t>
             </a:r>
             <a:r>
-              <a:rPr lang="en-US" sz="2800" i="0" u="none" strike="noStrike" cap="none" dirty="0">
+              <a:rPr lang="en-US" sz="2800" b="1" i="0" u="none" strike="noStrike" cap="none" dirty="0">
                 <a:solidFill>
                   <a:srgbClr val="FFFF00"/>
                 </a:solidFill>
@@ -23697,7 +23685,7 @@
               <a:buNone/>
             </a:pPr>
             <a:r>
-              <a:rPr lang="en-US" sz="2800" i="0" u="none" strike="noStrike" cap="none" dirty="0" err="1">
+              <a:rPr lang="en-US" sz="2800" b="1" i="0" u="none" strike="noStrike" cap="none" dirty="0" err="1">
                 <a:solidFill>
                   <a:srgbClr val="00FF00"/>
                 </a:solidFill>
@@ -23709,7 +23697,7 @@
               <a:t>usf</a:t>
             </a:r>
             <a:r>
-              <a:rPr lang="en-US" sz="2800" i="0" u="none" strike="noStrike" cap="none" dirty="0">
+              <a:rPr lang="en-US" sz="2800" b="1" i="0" u="none" strike="noStrike" cap="none" dirty="0">
                 <a:solidFill>
                   <a:schemeClr val="lt1"/>
                 </a:solidFill>
@@ -23721,7 +23709,7 @@
               <a:t> = </a:t>
             </a:r>
             <a:r>
-              <a:rPr lang="en-US" sz="2800" i="0" u="none" strike="noStrike" cap="none" dirty="0" err="1">
+              <a:rPr lang="en-US" sz="2800" b="1" i="0" u="none" strike="noStrike" cap="none" dirty="0" err="1">
                 <a:solidFill>
                   <a:srgbClr val="FFFF00"/>
                 </a:solidFill>
@@ -23733,7 +23721,7 @@
               <a:t>int</a:t>
             </a:r>
             <a:r>
-              <a:rPr lang="en-US" sz="2800" i="0" u="none" strike="noStrike" cap="none" dirty="0">
+              <a:rPr lang="en-US" sz="2800" b="1" i="0" u="none" strike="noStrike" cap="none" dirty="0">
                 <a:solidFill>
                   <a:srgbClr val="FFFF00"/>
                 </a:solidFill>
@@ -23745,7 +23733,7 @@
               <a:t>(</a:t>
             </a:r>
             <a:r>
-              <a:rPr lang="en-US" sz="2800" i="0" u="none" strike="noStrike" cap="none" dirty="0" err="1">
+              <a:rPr lang="en-US" sz="2800" b="1" i="0" u="none" strike="noStrike" cap="none" dirty="0" err="1">
                 <a:solidFill>
                   <a:srgbClr val="00FF00"/>
                 </a:solidFill>
@@ -23757,7 +23745,7 @@
               <a:t>inp</a:t>
             </a:r>
             <a:r>
-              <a:rPr lang="en-US" sz="2800" i="0" u="none" strike="noStrike" cap="none" dirty="0">
+              <a:rPr lang="en-US" sz="2800" b="1" i="0" u="none" strike="noStrike" cap="none" dirty="0">
                 <a:solidFill>
                   <a:srgbClr val="FFFF00"/>
                 </a:solidFill>
@@ -23769,7 +23757,7 @@
               <a:t>)</a:t>
             </a:r>
             <a:r>
-              <a:rPr lang="en-US" sz="2800" i="0" u="none" strike="noStrike" cap="none" dirty="0">
+              <a:rPr lang="en-US" sz="2800" b="1" i="0" u="none" strike="noStrike" cap="none" dirty="0">
                 <a:solidFill>
                   <a:schemeClr val="lt1"/>
                 </a:solidFill>
@@ -23781,7 +23769,7 @@
               <a:t> </a:t>
             </a:r>
             <a:r>
-              <a:rPr lang="en-US" sz="2800" i="0" u="none" strike="noStrike" cap="none" dirty="0">
+              <a:rPr lang="en-US" sz="2800" b="1" i="0" u="none" strike="noStrike" cap="none" dirty="0">
                 <a:solidFill>
                   <a:srgbClr val="00FFFF"/>
                 </a:solidFill>
@@ -23793,7 +23781,7 @@
               <a:t>+</a:t>
             </a:r>
             <a:r>
-              <a:rPr lang="en-US" sz="2800" i="0" u="none" strike="noStrike" cap="none" dirty="0">
+              <a:rPr lang="en-US" sz="2800" b="1" i="0" u="none" strike="noStrike" cap="none" dirty="0">
                 <a:solidFill>
                   <a:schemeClr val="lt1"/>
                 </a:solidFill>
@@ -23824,7 +23812,7 @@
               <a:buNone/>
             </a:pPr>
             <a:r>
-              <a:rPr lang="en-US" sz="2800" i="0" u="none" strike="noStrike" cap="none" dirty="0">
+              <a:rPr lang="en-US" sz="2800" b="1" i="0" u="none" strike="noStrike" cap="none" dirty="0">
                 <a:solidFill>
                   <a:srgbClr val="FFFF00"/>
                 </a:solidFill>
@@ -23836,7 +23824,7 @@
               <a:t>print(</a:t>
             </a:r>
             <a:r>
-              <a:rPr lang="en-US" sz="2800" i="0" u="none" strike="noStrike" cap="none" dirty="0">
+              <a:rPr lang="en-US" sz="2800" b="1" i="0" u="none" strike="noStrike" cap="none" dirty="0">
                 <a:solidFill>
                   <a:schemeClr val="lt1"/>
                 </a:solidFill>
@@ -23848,7 +23836,7 @@
               <a:t>'US floor', </a:t>
             </a:r>
             <a:r>
-              <a:rPr lang="en-US" sz="2800" i="0" u="none" strike="noStrike" cap="none" dirty="0" err="1">
+              <a:rPr lang="en-US" sz="2800" b="1" i="0" u="none" strike="noStrike" cap="none" dirty="0" err="1">
                 <a:solidFill>
                   <a:srgbClr val="00FF00"/>
                 </a:solidFill>
@@ -23860,7 +23848,7 @@
               <a:t>usf</a:t>
             </a:r>
             <a:r>
-              <a:rPr lang="en-US" sz="2800" i="0" u="none" strike="noStrike" cap="none" dirty="0">
+              <a:rPr lang="en-US" sz="2800" b="1" i="0" u="none" strike="noStrike" cap="none" dirty="0">
                 <a:solidFill>
                   <a:srgbClr val="FFFF00"/>
                 </a:solidFill>
@@ -25291,7 +25279,7 @@
               <a:buNone/>
             </a:pPr>
             <a:r>
-              <a:rPr lang="en-US" sz="2400" i="0" u="none" strike="noStrike" cap="none" dirty="0">
+              <a:rPr lang="en-US" sz="2400" b="1" i="0" u="none" strike="noStrike" cap="none" dirty="0">
                 <a:solidFill>
                   <a:srgbClr val="FFFF00"/>
                 </a:solidFill>
@@ -25322,7 +25310,7 @@
               <a:buNone/>
             </a:pPr>
             <a:r>
-              <a:rPr lang="en-US" sz="2400" i="0" u="none" strike="noStrike" cap="none" dirty="0">
+              <a:rPr lang="en-US" sz="2400" b="1" i="0" u="none" strike="noStrike" cap="none" dirty="0">
                 <a:solidFill>
                   <a:schemeClr val="lt1"/>
                 </a:solidFill>
@@ -25353,7 +25341,7 @@
               <a:buNone/>
             </a:pPr>
             <a:r>
-              <a:rPr lang="en-US" sz="2400" i="0" u="none" strike="noStrike" cap="none" dirty="0">
+              <a:rPr lang="en-US" sz="2400" b="1" i="0" u="none" strike="noStrike" cap="none" dirty="0">
                 <a:solidFill>
                   <a:schemeClr val="lt1"/>
                 </a:solidFill>
@@ -25378,7 +25366,7 @@
               </a:spcAft>
               <a:buNone/>
             </a:pPr>
-            <a:endParaRPr sz="2400" i="0" u="none" strike="noStrike" cap="none" dirty="0">
+            <a:endParaRPr sz="2400" b="1" i="0" u="none" strike="noStrike" cap="none" dirty="0">
               <a:solidFill>
                 <a:srgbClr val="FFFF00"/>
               </a:solidFill>
@@ -25407,7 +25395,7 @@
               <a:buNone/>
             </a:pPr>
             <a:r>
-              <a:rPr lang="en-US" sz="2400" i="0" u="none" strike="noStrike" cap="none" dirty="0">
+              <a:rPr lang="en-US" sz="2400" b="1" i="0" u="none" strike="noStrike" cap="none" dirty="0">
                 <a:solidFill>
                   <a:srgbClr val="FFFF00"/>
                 </a:solidFill>
@@ -25427,7 +25415,7 @@
               <a:buSzPct val="25000"/>
             </a:pPr>
             <a:r>
-              <a:rPr lang="en-US" sz="2400" dirty="0">
+              <a:rPr lang="en-US" sz="2400" b="1" dirty="0">
                 <a:solidFill>
                   <a:srgbClr val="FFFFFF"/>
                 </a:solidFill>
@@ -25439,7 +25427,7 @@
               <a:t>counts = </a:t>
             </a:r>
             <a:r>
-              <a:rPr lang="en-US" sz="2400" dirty="0" err="1">
+              <a:rPr lang="en-US" sz="2400" b="1" dirty="0" err="1">
                 <a:solidFill>
                   <a:srgbClr val="FFFFFF"/>
                 </a:solidFill>
@@ -25451,7 +25439,7 @@
               <a:t>dict</a:t>
             </a:r>
             <a:r>
-              <a:rPr lang="en-US" sz="2400" dirty="0">
+              <a:rPr lang="en-US" sz="2400" b="1" dirty="0">
                 <a:solidFill>
                   <a:srgbClr val="FFFFFF"/>
                 </a:solidFill>
@@ -25471,7 +25459,7 @@
               <a:buSzPct val="25000"/>
             </a:pPr>
             <a:r>
-              <a:rPr lang="en-US" sz="2400" dirty="0">
+              <a:rPr lang="en-US" sz="2400" b="1" dirty="0">
                 <a:solidFill>
                   <a:srgbClr val="FFFFFF"/>
                 </a:solidFill>
@@ -25491,7 +25479,7 @@
               <a:buSzPct val="25000"/>
             </a:pPr>
             <a:r>
-              <a:rPr lang="en-US" sz="2400" dirty="0">
+              <a:rPr lang="en-US" sz="2400" b="1" dirty="0">
                 <a:solidFill>
                   <a:srgbClr val="FFFFFF"/>
                 </a:solidFill>
@@ -25503,7 +25491,7 @@
               <a:t>    words = </a:t>
             </a:r>
             <a:r>
-              <a:rPr lang="en-US" sz="2400" dirty="0" err="1">
+              <a:rPr lang="en-US" sz="2400" b="1" dirty="0" err="1">
                 <a:solidFill>
                   <a:srgbClr val="FFFFFF"/>
                 </a:solidFill>
@@ -25515,7 +25503,7 @@
               <a:t>line.split</a:t>
             </a:r>
             <a:r>
-              <a:rPr lang="en-US" sz="2400" dirty="0">
+              <a:rPr lang="en-US" sz="2400" b="1" dirty="0">
                 <a:solidFill>
                   <a:srgbClr val="FFFFFF"/>
                 </a:solidFill>
@@ -25535,7 +25523,7 @@
               <a:buSzPct val="25000"/>
             </a:pPr>
             <a:r>
-              <a:rPr lang="en-US" sz="2400" dirty="0">
+              <a:rPr lang="en-US" sz="2400" b="1" dirty="0">
                 <a:solidFill>
                   <a:srgbClr val="FFFFFF"/>
                 </a:solidFill>
@@ -25555,7 +25543,7 @@
               <a:buSzPct val="25000"/>
             </a:pPr>
             <a:r>
-              <a:rPr lang="en-US" sz="2400" dirty="0">
+              <a:rPr lang="en-US" sz="2400" b="1" dirty="0">
                 <a:solidFill>
                   <a:srgbClr val="FFFFFF"/>
                 </a:solidFill>
@@ -25567,7 +25555,7 @@
               <a:t>        counts[word] = </a:t>
             </a:r>
             <a:r>
-              <a:rPr lang="en-US" sz="2400" dirty="0" err="1">
+              <a:rPr lang="en-US" sz="2400" b="1" dirty="0" err="1">
                 <a:solidFill>
                   <a:srgbClr val="FFFFFF"/>
                 </a:solidFill>
@@ -25579,7 +25567,7 @@
               <a:t>counts.get</a:t>
             </a:r>
             <a:r>
-              <a:rPr lang="en-US" sz="2400" dirty="0">
+              <a:rPr lang="en-US" sz="2400" b="1" dirty="0">
                 <a:solidFill>
                   <a:srgbClr val="FFFFFF"/>
                 </a:solidFill>
@@ -25604,7 +25592,7 @@
               </a:spcAft>
               <a:buNone/>
             </a:pPr>
-            <a:endParaRPr sz="2400" i="0" u="none" strike="noStrike" cap="none" dirty="0">
+            <a:endParaRPr sz="2400" b="1" i="0" u="none" strike="noStrike" cap="none" dirty="0">
               <a:solidFill>
                 <a:srgbClr val="FFFF00"/>
               </a:solidFill>
@@ -25633,7 +25621,7 @@
               <a:buNone/>
             </a:pPr>
             <a:r>
-              <a:rPr lang="en-US" sz="2400" i="0" u="none" strike="noStrike" cap="none" dirty="0">
+              <a:rPr lang="en-US" sz="2400" b="1" i="0" u="none" strike="noStrike" cap="none" dirty="0">
                 <a:solidFill>
                   <a:srgbClr val="FFFF00"/>
                 </a:solidFill>
@@ -25664,7 +25652,7 @@
               <a:buNone/>
             </a:pPr>
             <a:r>
-              <a:rPr lang="en-US" sz="2400" i="0" u="none" strike="noStrike" cap="none" dirty="0" err="1">
+              <a:rPr lang="en-US" sz="2400" b="1" i="0" u="none" strike="noStrike" cap="none" dirty="0" err="1">
                 <a:solidFill>
                   <a:srgbClr val="FFFFFF"/>
                 </a:solidFill>
@@ -25676,7 +25664,7 @@
               <a:t>bigcount</a:t>
             </a:r>
             <a:r>
-              <a:rPr lang="en-US" sz="2400" i="0" u="none" strike="noStrike" cap="none" dirty="0">
+              <a:rPr lang="en-US" sz="2400" b="1" i="0" u="none" strike="noStrike" cap="none" dirty="0">
                 <a:solidFill>
                   <a:srgbClr val="FFFFFF"/>
                 </a:solidFill>
@@ -25707,7 +25695,7 @@
               <a:buNone/>
             </a:pPr>
             <a:r>
-              <a:rPr lang="en-US" sz="2400" i="0" u="none" strike="noStrike" cap="none" dirty="0" err="1">
+              <a:rPr lang="en-US" sz="2400" b="1" i="0" u="none" strike="noStrike" cap="none" dirty="0" err="1">
                 <a:solidFill>
                   <a:srgbClr val="FFFFFF"/>
                 </a:solidFill>
@@ -25719,7 +25707,7 @@
               <a:t>bigword</a:t>
             </a:r>
             <a:r>
-              <a:rPr lang="en-US" sz="2400" i="0" u="none" strike="noStrike" cap="none" dirty="0">
+              <a:rPr lang="en-US" sz="2400" b="1" i="0" u="none" strike="noStrike" cap="none" dirty="0">
                 <a:solidFill>
                   <a:srgbClr val="FFFFFF"/>
                 </a:solidFill>
@@ -25750,7 +25738,7 @@
               <a:buNone/>
             </a:pPr>
             <a:r>
-              <a:rPr lang="en-US" sz="2400" i="0" u="none" strike="noStrike" cap="none" dirty="0">
+              <a:rPr lang="en-US" sz="2400" b="1" i="0" u="none" strike="noStrike" cap="none" dirty="0">
                 <a:solidFill>
                   <a:srgbClr val="FFFFFF"/>
                 </a:solidFill>
@@ -25762,7 +25750,7 @@
               <a:t>for </a:t>
             </a:r>
             <a:r>
-              <a:rPr lang="en-US" sz="2400" i="0" u="none" strike="noStrike" cap="none" dirty="0" err="1">
+              <a:rPr lang="en-US" sz="2400" b="1" i="0" u="none" strike="noStrike" cap="none" dirty="0" err="1">
                 <a:solidFill>
                   <a:srgbClr val="FFFFFF"/>
                 </a:solidFill>
@@ -25774,7 +25762,7 @@
               <a:t>word,count</a:t>
             </a:r>
             <a:r>
-              <a:rPr lang="en-US" sz="2400" i="0" u="none" strike="noStrike" cap="none" dirty="0">
+              <a:rPr lang="en-US" sz="2400" b="1" i="0" u="none" strike="noStrike" cap="none" dirty="0">
                 <a:solidFill>
                   <a:srgbClr val="FFFFFF"/>
                 </a:solidFill>
@@ -25786,7 +25774,7 @@
               <a:t> in </a:t>
             </a:r>
             <a:r>
-              <a:rPr lang="en-US" sz="2400" i="0" u="none" strike="noStrike" cap="none" dirty="0" err="1">
+              <a:rPr lang="en-US" sz="2400" b="1" i="0" u="none" strike="noStrike" cap="none" dirty="0" err="1">
                 <a:solidFill>
                   <a:srgbClr val="FFFFFF"/>
                 </a:solidFill>
@@ -25798,7 +25786,7 @@
               <a:t>counts.items</a:t>
             </a:r>
             <a:r>
-              <a:rPr lang="en-US" sz="2400" i="0" u="none" strike="noStrike" cap="none" dirty="0">
+              <a:rPr lang="en-US" sz="2400" b="1" i="0" u="none" strike="noStrike" cap="none" dirty="0">
                 <a:solidFill>
                   <a:srgbClr val="FFFFFF"/>
                 </a:solidFill>
@@ -25829,7 +25817,7 @@
               <a:buNone/>
             </a:pPr>
             <a:r>
-              <a:rPr lang="en-US" sz="2400" i="0" u="none" strike="noStrike" cap="none" dirty="0">
+              <a:rPr lang="en-US" sz="2400" b="1" i="0" u="none" strike="noStrike" cap="none" dirty="0">
                 <a:solidFill>
                   <a:srgbClr val="FFFFFF"/>
                 </a:solidFill>
@@ -25841,7 +25829,7 @@
               <a:t>    if </a:t>
             </a:r>
             <a:r>
-              <a:rPr lang="en-US" sz="2400" i="0" u="none" strike="noStrike" cap="none" dirty="0" err="1">
+              <a:rPr lang="en-US" sz="2400" b="1" i="0" u="none" strike="noStrike" cap="none" dirty="0" err="1">
                 <a:solidFill>
                   <a:srgbClr val="FFFFFF"/>
                 </a:solidFill>
@@ -25853,7 +25841,7 @@
               <a:t>bigcount</a:t>
             </a:r>
             <a:r>
-              <a:rPr lang="en-US" sz="2400" i="0" u="none" strike="noStrike" cap="none" dirty="0">
+              <a:rPr lang="en-US" sz="2400" b="1" i="0" u="none" strike="noStrike" cap="none" dirty="0">
                 <a:solidFill>
                   <a:srgbClr val="FFFFFF"/>
                 </a:solidFill>
@@ -25865,7 +25853,7 @@
               <a:t> is None or count &gt; </a:t>
             </a:r>
             <a:r>
-              <a:rPr lang="en-US" sz="2400" i="0" u="none" strike="noStrike" cap="none" dirty="0" err="1">
+              <a:rPr lang="en-US" sz="2400" b="1" i="0" u="none" strike="noStrike" cap="none" dirty="0" err="1">
                 <a:solidFill>
                   <a:srgbClr val="FFFFFF"/>
                 </a:solidFill>
@@ -25877,7 +25865,7 @@
               <a:t>bigcount</a:t>
             </a:r>
             <a:r>
-              <a:rPr lang="en-US" sz="2400" i="0" u="none" strike="noStrike" cap="none" dirty="0">
+              <a:rPr lang="en-US" sz="2400" b="1" i="0" u="none" strike="noStrike" cap="none" dirty="0">
                 <a:solidFill>
                   <a:srgbClr val="FFFFFF"/>
                 </a:solidFill>
@@ -25908,7 +25896,7 @@
               <a:buNone/>
             </a:pPr>
             <a:r>
-              <a:rPr lang="en-US" sz="2400" i="0" u="none" strike="noStrike" cap="none" dirty="0">
+              <a:rPr lang="en-US" sz="2400" b="1" i="0" u="none" strike="noStrike" cap="none" dirty="0">
                 <a:solidFill>
                   <a:srgbClr val="FFFFFF"/>
                 </a:solidFill>
@@ -25920,7 +25908,7 @@
               <a:t>        </a:t>
             </a:r>
             <a:r>
-              <a:rPr lang="en-US" sz="2400" i="0" u="none" strike="noStrike" cap="none" dirty="0" err="1">
+              <a:rPr lang="en-US" sz="2400" b="1" i="0" u="none" strike="noStrike" cap="none" dirty="0" err="1">
                 <a:solidFill>
                   <a:srgbClr val="FFFFFF"/>
                 </a:solidFill>
@@ -25932,7 +25920,7 @@
               <a:t>bigword</a:t>
             </a:r>
             <a:r>
-              <a:rPr lang="en-US" sz="2400" i="0" u="none" strike="noStrike" cap="none" dirty="0">
+              <a:rPr lang="en-US" sz="2400" b="1" i="0" u="none" strike="noStrike" cap="none" dirty="0">
                 <a:solidFill>
                   <a:srgbClr val="FFFFFF"/>
                 </a:solidFill>
@@ -25963,7 +25951,7 @@
               <a:buNone/>
             </a:pPr>
             <a:r>
-              <a:rPr lang="en-US" sz="2400" i="0" u="none" strike="noStrike" cap="none" dirty="0">
+              <a:rPr lang="en-US" sz="2400" b="1" i="0" u="none" strike="noStrike" cap="none" dirty="0">
                 <a:solidFill>
                   <a:srgbClr val="FFFFFF"/>
                 </a:solidFill>
@@ -25975,7 +25963,7 @@
               <a:t>        </a:t>
             </a:r>
             <a:r>
-              <a:rPr lang="en-US" sz="2400" i="0" u="none" strike="noStrike" cap="none" dirty="0" err="1">
+              <a:rPr lang="en-US" sz="2400" b="1" i="0" u="none" strike="noStrike" cap="none" dirty="0" err="1">
                 <a:solidFill>
                   <a:srgbClr val="FFFFFF"/>
                 </a:solidFill>
@@ -25987,7 +25975,7 @@
               <a:t>bigcount</a:t>
             </a:r>
             <a:r>
-              <a:rPr lang="en-US" sz="2400" i="0" u="none" strike="noStrike" cap="none" dirty="0">
+              <a:rPr lang="en-US" sz="2400" b="1" i="0" u="none" strike="noStrike" cap="none" dirty="0">
                 <a:solidFill>
                   <a:srgbClr val="FFFFFF"/>
                 </a:solidFill>
@@ -26012,7 +26000,7 @@
               </a:spcAft>
               <a:buNone/>
             </a:pPr>
-            <a:endParaRPr sz="2400" i="0" u="none" strike="noStrike" cap="none" dirty="0">
+            <a:endParaRPr sz="2400" b="1" i="0" u="none" strike="noStrike" cap="none" dirty="0">
               <a:solidFill>
                 <a:srgbClr val="FFFF00"/>
               </a:solidFill>
@@ -26041,7 +26029,7 @@
               <a:buNone/>
             </a:pPr>
             <a:r>
-              <a:rPr lang="en-US" sz="2400" i="0" u="none" strike="noStrike" cap="none" dirty="0">
+              <a:rPr lang="en-US" sz="2400" b="1" i="0" u="none" strike="noStrike" cap="none" dirty="0">
                 <a:solidFill>
                   <a:srgbClr val="FFFF00"/>
                 </a:solidFill>
@@ -26053,7 +26041,7 @@
               <a:t># All </a:t>
             </a:r>
             <a:r>
-              <a:rPr lang="en-US" sz="2400" dirty="0">
+              <a:rPr lang="en-US" sz="2400" b="1" dirty="0">
                 <a:solidFill>
                   <a:srgbClr val="FFFF00"/>
                 </a:solidFill>
@@ -26065,7 +26053,7 @@
               <a:t>d</a:t>
             </a:r>
             <a:r>
-              <a:rPr lang="en-US" sz="2400" i="0" u="none" strike="noStrike" cap="none" dirty="0">
+              <a:rPr lang="en-US" sz="2400" b="1" i="0" u="none" strike="noStrike" cap="none" dirty="0">
                 <a:solidFill>
                   <a:srgbClr val="FFFF00"/>
                 </a:solidFill>
@@ -26096,7 +26084,7 @@
               <a:buNone/>
             </a:pPr>
             <a:r>
-              <a:rPr lang="en-US" sz="2400" dirty="0">
+              <a:rPr lang="en-US" sz="2400" b="1" dirty="0">
                 <a:solidFill>
                   <a:srgbClr val="FFFFFF"/>
                 </a:solidFill>
@@ -26108,7 +26096,7 @@
               <a:t>p</a:t>
             </a:r>
             <a:r>
-              <a:rPr lang="en-US" sz="2400" i="0" u="none" strike="noStrike" cap="none" dirty="0">
+              <a:rPr lang="en-US" sz="2400" b="1" i="0" u="none" strike="noStrike" cap="none" dirty="0">
                 <a:solidFill>
                   <a:srgbClr val="FFFFFF"/>
                 </a:solidFill>
@@ -26120,7 +26108,7 @@
               <a:t>rint(</a:t>
             </a:r>
             <a:r>
-              <a:rPr lang="en-US" sz="2400" i="0" u="none" strike="noStrike" cap="none" dirty="0" err="1">
+              <a:rPr lang="en-US" sz="2400" b="1" i="0" u="none" strike="noStrike" cap="none" dirty="0" err="1">
                 <a:solidFill>
                   <a:srgbClr val="FFFFFF"/>
                 </a:solidFill>
@@ -26132,7 +26120,7 @@
               <a:t>bigword</a:t>
             </a:r>
             <a:r>
-              <a:rPr lang="en-US" sz="2400" i="0" u="none" strike="noStrike" cap="none" dirty="0">
+              <a:rPr lang="en-US" sz="2400" b="1" i="0" u="none" strike="noStrike" cap="none" dirty="0">
                 <a:solidFill>
                   <a:srgbClr val="FFFFFF"/>
                 </a:solidFill>
@@ -26144,7 +26132,7 @@
               <a:t>, </a:t>
             </a:r>
             <a:r>
-              <a:rPr lang="en-US" sz="2400" i="0" u="none" strike="noStrike" cap="none" dirty="0" err="1">
+              <a:rPr lang="en-US" sz="2400" b="1" i="0" u="none" strike="noStrike" cap="none" dirty="0" err="1">
                 <a:solidFill>
                   <a:srgbClr val="FFFFFF"/>
                 </a:solidFill>
@@ -26156,7 +26144,7 @@
               <a:t>bigcount</a:t>
             </a:r>
             <a:r>
-              <a:rPr lang="en-US" sz="2400" i="0" u="none" strike="noStrike" cap="none" dirty="0">
+              <a:rPr lang="en-US" sz="2400" b="1" i="0" u="none" strike="noStrike" cap="none" dirty="0">
                 <a:solidFill>
                   <a:srgbClr val="FFFFFF"/>
                 </a:solidFill>
